--- a/week02_game_of_life/Slides/flammenkamp_constant.pptx
+++ b/week02_game_of_life/Slides/flammenkamp_constant.pptx
@@ -4,6 +4,9 @@
   <p:sldMasterIdLst>
     <p:sldMasterId id="2147483648" r:id="rId1"/>
   </p:sldMasterIdLst>
+  <p:notesMasterIdLst>
+    <p:notesMasterId r:id="rId8"/>
+  </p:notesMasterIdLst>
   <p:sldIdLst>
     <p:sldId id="256" r:id="rId2"/>
     <p:sldId id="257" r:id="rId3"/>
@@ -12,10 +15,7 @@
     <p:sldId id="260" r:id="rId6"/>
     <p:sldId id="261" r:id="rId7"/>
   </p:sldIdLst>
-  <p:notesMasterIdLst>
-    <p:notesMasterId r:id="rId8"/>
-  </p:notesMasterIdLst>
-  <p:sldSz cx="9144000" cy="5143500"/>
+  <p:sldSz cx="9144000" cy="5143500" type="screen16x9"/>
   <p:notesSz cx="5143500" cy="9144000"/>
   <p:defaultTextStyle>
     <a:lvl1pPr marL="0" algn="l" defTabSz="914400" rtl="0" eaLnBrk="1" latinLnBrk="0" hangingPunct="1">
@@ -109,7 +109,68 @@
       </a:defRPr>
     </a:lvl9pPr>
   </p:defaultTextStyle>
+  <p:extLst>
+    <p:ext uri="{EFAFB233-063F-42B5-8137-9DF3F51BA10A}">
+      <p15:sldGuideLst xmlns:p15="http://schemas.microsoft.com/office/powerpoint/2012/main"/>
+    </p:ext>
+  </p:extLst>
 </p:presentation>
+</file>
+
+<file path=ppt/ink/ink1.xml><?xml version="1.0" encoding="utf-8"?>
+<inkml:ink xmlns:inkml="http://www.w3.org/2003/InkML">
+  <inkml:definitions>
+    <inkml:context xml:id="ctx0">
+      <inkml:inkSource xml:id="inkSrc0">
+        <inkml:traceFormat>
+          <inkml:channel name="X" type="integer" min="-2.14748E9" max="2.14748E9" units="cm"/>
+          <inkml:channel name="Y" type="integer" min="-2.14748E9" max="2.14748E9" units="cm"/>
+          <inkml:channel name="F" type="integer" max="32767" units="dev"/>
+        </inkml:traceFormat>
+        <inkml:channelProperties>
+          <inkml:channelProperty channel="X" name="resolution" value="1000" units="1/cm"/>
+          <inkml:channelProperty channel="Y" name="resolution" value="1000" units="1/cm"/>
+          <inkml:channelProperty channel="F" name="resolution" value="0" units="1/dev"/>
+        </inkml:channelProperties>
+      </inkml:inkSource>
+      <inkml:timestamp xml:id="ts0" timeString="2026-03-09T13:19:13.555"/>
+    </inkml:context>
+    <inkml:brush xml:id="br0">
+      <inkml:brushProperty name="width" value="0.05" units="cm"/>
+      <inkml:brushProperty name="height" value="0.05" units="cm"/>
+      <inkml:brushProperty name="color" value="#E71224"/>
+    </inkml:brush>
+  </inkml:definitions>
+  <inkml:trace contextRef="#ctx0" brushRef="#br0">1 1 24575,'84'50'0,"0"0"0,0 1 0,0-1 0,0 0 0,0 1 0,0-1 0,0 0 0,-1 0 0,1 1 0,0-1 0,0 0 0,0 1 0,0-1 0,0 0 0,0 1 0,0-1 0,0 0 0,6 3 0,2 2 0,1 0 0,1 0 0,0 1 0,-1-1 0,0-1 0,-2-1 0,-3-1 0,-2-1 0,-3-3 0,-5-2 0,-4-3 0,-6-3 0,-5-3-888,25 15 0,-13-8 0,-6-3 0,-2-2 0,4 1 888,6 2 0,2 1 0,-1-2 0,-1-1 0,-6-1 0,13 7 0,-6-3 0,4 3 0,-2-2 0,5 2 0,0 0 0,-1-1 0,-11-7 0,0-2 0,-1 1 0,3 4 0,-1 2 0,2 5 0,1 1 0,-1-1 0,-3-4 0,0-3 0,-2-2 0,-1-1 0,-1 1 314,1 3 0,1 2 0,-3-2 0,-8-7-314,6 1 0,-12-10 746,-4-13-746,-62-38 0,8 15 0,-19-19 0</inkml:trace>
+</inkml:ink>
+</file>
+
+<file path=ppt/ink/ink2.xml><?xml version="1.0" encoding="utf-8"?>
+<inkml:ink xmlns:inkml="http://www.w3.org/2003/InkML">
+  <inkml:definitions>
+    <inkml:context xml:id="ctx0">
+      <inkml:inkSource xml:id="inkSrc0">
+        <inkml:traceFormat>
+          <inkml:channel name="X" type="integer" min="-2.14748E9" max="2.14748E9" units="cm"/>
+          <inkml:channel name="Y" type="integer" min="-2.14748E9" max="2.14748E9" units="cm"/>
+          <inkml:channel name="F" type="integer" max="32767" units="dev"/>
+        </inkml:traceFormat>
+        <inkml:channelProperties>
+          <inkml:channelProperty channel="X" name="resolution" value="1000" units="1/cm"/>
+          <inkml:channelProperty channel="Y" name="resolution" value="1000" units="1/cm"/>
+          <inkml:channelProperty channel="F" name="resolution" value="0" units="1/dev"/>
+        </inkml:channelProperties>
+      </inkml:inkSource>
+      <inkml:timestamp xml:id="ts0" timeString="2026-03-09T13:19:14.871"/>
+    </inkml:context>
+    <inkml:brush xml:id="br0">
+      <inkml:brushProperty name="width" value="0.05" units="cm"/>
+      <inkml:brushProperty name="height" value="0.05" units="cm"/>
+      <inkml:brushProperty name="color" value="#E71224"/>
+    </inkml:brush>
+  </inkml:definitions>
+  <inkml:trace contextRef="#ctx0" brushRef="#br0">2604 0 24575,'0'2'0,"-52"80"0,20-33 0,-5 4 0,-7 7 0,-6 8 0,-2 0-1012,-7 4 1,-2 1-1,-3 2 1012,12-14 0,-1 2 0,-1 0 0,-1 2-340,-5 6 1,-1 2 0,-1 1 0,3-2 339,6-6 0,1-1 0,0 0 0,0 3 0,-5 8 0,-1 3 0,1 1 0,1 0-360,2 0 1,1 0 0,1 2 0,-1 2 359,6-10 0,1 2 0,-1 1 0,0 1 0,0 2 0,4-6 0,-2 3 0,1 1 0,0 0 0,1-2 0,2-4 0,-10 15 0,3-4 0,0-1 0,1 0-135,1 3 1,1 2 0,1-4 0,4-11 134,-9 5 0,7-10 589,13-7 0,5-7-589,-4-3 0,18-23 0,7-15 0</inkml:trace>
+</inkml:ink>
 </file>
 
 <file path=ppt/notesMasters/notesMaster1.xml><?xml version="1.0" encoding="utf-8"?>
@@ -134,234 +195,10 @@
           <a:chExt cx="0" cy="0"/>
         </a:xfrm>
       </p:grpSpPr>
-      <p:sp>
-        <p:nvSpPr>
-          <p:cNvPr id="2" name="Header Placeholder 1"/>
-          <p:cNvSpPr>
-            <a:spLocks noGrp="1"/>
-          </p:cNvSpPr>
-          <p:nvPr>
-            <p:ph type="hdr" sz="quarter"/>
-          </p:nvPr>
-        </p:nvSpPr>
-        <p:spPr>
-          <a:xfrm>
-            <a:off x="0" y="0"/>
-            <a:ext cx="2971800" cy="458788"/>
-          </a:xfrm>
-          <a:prstGeom prst="rect">
-            <a:avLst/>
-          </a:prstGeom>
-        </p:spPr>
-        <p:txBody>
-          <a:bodyPr vert="horz" lIns="91440" tIns="45720" rIns="91440" bIns="45720" rtlCol="0"/>
-          <a:lstStyle>
-            <a:lvl1pPr algn="l">
-              <a:defRPr sz="1200"/>
-            </a:lvl1pPr>
-          </a:lstStyle>
-          <a:p>
-            <a:endParaRPr lang="en-US"/>
-          </a:p>
-        </p:txBody>
-      </p:sp>
-      <p:sp>
-        <p:nvSpPr>
-          <p:cNvPr id="3" name="Date Placeholder 2"/>
-          <p:cNvSpPr>
-            <a:spLocks noGrp="1"/>
-          </p:cNvSpPr>
-          <p:nvPr>
-            <p:ph type="dt" idx="1"/>
-          </p:nvPr>
-        </p:nvSpPr>
-        <p:spPr>
-          <a:xfrm>
-            <a:off x="3884613" y="0"/>
-            <a:ext cx="2971800" cy="458788"/>
-          </a:xfrm>
-          <a:prstGeom prst="rect">
-            <a:avLst/>
-          </a:prstGeom>
-        </p:spPr>
-        <p:txBody>
-          <a:bodyPr vert="horz" lIns="91440" tIns="45720" rIns="91440" bIns="45720" rtlCol="0"/>
-          <a:lstStyle>
-            <a:lvl1pPr algn="r">
-              <a:defRPr sz="1200"/>
-            </a:lvl1pPr>
-          </a:lstStyle>
-          <a:p>
-            <a:fld id="{5282F153-3F37-0F45-9E97-73ACFA13230C}" type="datetimeFigureOut">
-              <a:rPr lang="en-US"/>
-              <a:t>7/23/19</a:t>
-            </a:fld>
-            <a:endParaRPr lang="en-US"/>
-          </a:p>
-        </p:txBody>
-      </p:sp>
-      <p:sp>
-        <p:nvSpPr>
-          <p:cNvPr id="4" name="Slide Image Placeholder 3"/>
-          <p:cNvSpPr>
-            <a:spLocks noGrp="1" noRot="1" noChangeAspect="1"/>
-          </p:cNvSpPr>
-          <p:nvPr>
-            <p:ph type="sldImg" idx="2"/>
-          </p:nvPr>
-        </p:nvSpPr>
-        <p:spPr>
-          <a:xfrm>
-            <a:off x="685800" y="1143000"/>
-            <a:ext cx="5486400" cy="3086100"/>
-          </a:xfrm>
-          <a:prstGeom prst="rect">
-            <a:avLst/>
-          </a:prstGeom>
-          <a:noFill/>
-          <a:ln w="12700">
-            <a:solidFill>
-              <a:prstClr val="black"/>
-            </a:solidFill>
-          </a:ln>
-        </p:spPr>
-        <p:txBody>
-          <a:bodyPr vert="horz" lIns="91440" tIns="45720" rIns="91440" bIns="45720" rtlCol="0" anchor="ctr"/>
-          <a:lstStyle/>
-          <a:p>
-            <a:endParaRPr lang="en-US"/>
-          </a:p>
-        </p:txBody>
-      </p:sp>
-      <p:sp>
-        <p:nvSpPr>
-          <p:cNvPr id="5" name="Notes Placeholder 4"/>
-          <p:cNvSpPr>
-            <a:spLocks noGrp="1"/>
-          </p:cNvSpPr>
-          <p:nvPr>
-            <p:ph type="body" sz="quarter" idx="3"/>
-          </p:nvPr>
-        </p:nvSpPr>
-        <p:spPr>
-          <a:xfrm>
-            <a:off x="685800" y="4400550"/>
-            <a:ext cx="5486400" cy="3600450"/>
-          </a:xfrm>
-          <a:prstGeom prst="rect">
-            <a:avLst/>
-          </a:prstGeom>
-        </p:spPr>
-        <p:txBody>
-          <a:bodyPr vert="horz" lIns="91440" tIns="45720" rIns="91440" bIns="45720" rtlCol="0"/>
-          <a:lstStyle/>
-          <a:p>
-            <a:pPr lvl="0"/>
-            <a:r>
-              <a:rPr lang="en-US"/>
-              <a:t>Click to edit Master text styles</a:t>
-            </a:r>
-          </a:p>
-          <a:p>
-            <a:pPr lvl="1"/>
-            <a:r>
-              <a:rPr lang="en-US"/>
-              <a:t>Second level</a:t>
-            </a:r>
-          </a:p>
-          <a:p>
-            <a:pPr lvl="2"/>
-            <a:r>
-              <a:rPr lang="en-US"/>
-              <a:t>Third level</a:t>
-            </a:r>
-          </a:p>
-          <a:p>
-            <a:pPr lvl="3"/>
-            <a:r>
-              <a:rPr lang="en-US"/>
-              <a:t>Fourth level</a:t>
-            </a:r>
-          </a:p>
-          <a:p>
-            <a:pPr lvl="4"/>
-            <a:r>
-              <a:rPr lang="en-US"/>
-              <a:t>Fifth level</a:t>
-            </a:r>
-          </a:p>
-        </p:txBody>
-      </p:sp>
-      <p:sp>
-        <p:nvSpPr>
-          <p:cNvPr id="6" name="Footer Placeholder 5"/>
-          <p:cNvSpPr>
-            <a:spLocks noGrp="1"/>
-          </p:cNvSpPr>
-          <p:nvPr>
-            <p:ph type="ftr" sz="quarter" idx="4"/>
-          </p:nvPr>
-        </p:nvSpPr>
-        <p:spPr>
-          <a:xfrm>
-            <a:off x="0" y="8685213"/>
-            <a:ext cx="2971800" cy="458787"/>
-          </a:xfrm>
-          <a:prstGeom prst="rect">
-            <a:avLst/>
-          </a:prstGeom>
-        </p:spPr>
-        <p:txBody>
-          <a:bodyPr vert="horz" lIns="91440" tIns="45720" rIns="91440" bIns="45720" rtlCol="0" anchor="b"/>
-          <a:lstStyle>
-            <a:lvl1pPr algn="l">
-              <a:defRPr sz="1200"/>
-            </a:lvl1pPr>
-          </a:lstStyle>
-          <a:p>
-            <a:endParaRPr lang="en-US"/>
-          </a:p>
-        </p:txBody>
-      </p:sp>
-      <p:sp>
-        <p:nvSpPr>
-          <p:cNvPr id="7" name="Slide Number Placeholder 6"/>
-          <p:cNvSpPr>
-            <a:spLocks noGrp="1"/>
-          </p:cNvSpPr>
-          <p:nvPr>
-            <p:ph type="sldNum" sz="quarter" idx="5"/>
-          </p:nvPr>
-        </p:nvSpPr>
-        <p:spPr>
-          <a:xfrm>
-            <a:off x="3884613" y="8685213"/>
-            <a:ext cx="2971800" cy="458787"/>
-          </a:xfrm>
-          <a:prstGeom prst="rect">
-            <a:avLst/>
-          </a:prstGeom>
-        </p:spPr>
-        <p:txBody>
-          <a:bodyPr vert="horz" lIns="91440" tIns="45720" rIns="91440" bIns="45720" rtlCol="0" anchor="b"/>
-          <a:lstStyle>
-            <a:lvl1pPr algn="r">
-              <a:defRPr sz="1200"/>
-            </a:lvl1pPr>
-          </a:lstStyle>
-          <a:p>
-            <a:fld id="{CE5E9CC1-C706-0F49-92D6-E571CC5EEA8F}" type="slidenum">
-              <a:rPr lang="en-US"/>
-              <a:t>‹#›</a:t>
-            </a:fld>
-            <a:endParaRPr lang="en-US"/>
-          </a:p>
-        </p:txBody>
-      </p:sp>
     </p:spTree>
     <p:extLst>
       <p:ext uri="{BB962C8B-B14F-4D97-AF65-F5344CB8AC3E}">
-        <p14:creationId xmlns:p14="http://schemas.microsoft.com/office/powerpoint/2010/main" val="1024086991"/>
+        <p14:creationId xmlns:p14="http://schemas.microsoft.com/office/powerpoint/2010/main" val="3486228789"/>
       </p:ext>
     </p:extLst>
   </p:cSld>
@@ -505,10 +342,6 @@
           <a:bodyPr/>
           <a:lstStyle/>
           <a:p>
-            <a:r>
-              <a:rPr lang="en-US" dirty="0"/>
-              <a:t/>
-            </a:r>
             <a:endParaRPr lang="en-US" dirty="0"/>
           </a:p>
         </p:txBody>
@@ -593,10 +426,6 @@
           <a:bodyPr/>
           <a:lstStyle/>
           <a:p>
-            <a:r>
-              <a:rPr lang="en-US" dirty="0"/>
-              <a:t/>
-            </a:r>
             <a:endParaRPr lang="en-US" dirty="0"/>
           </a:p>
         </p:txBody>
@@ -681,10 +510,6 @@
           <a:bodyPr/>
           <a:lstStyle/>
           <a:p>
-            <a:r>
-              <a:rPr lang="en-US" dirty="0"/>
-              <a:t/>
-            </a:r>
             <a:endParaRPr lang="en-US" dirty="0"/>
           </a:p>
         </p:txBody>
@@ -769,10 +594,6 @@
           <a:bodyPr/>
           <a:lstStyle/>
           <a:p>
-            <a:r>
-              <a:rPr lang="en-US" dirty="0"/>
-              <a:t/>
-            </a:r>
             <a:endParaRPr lang="en-US" dirty="0"/>
           </a:p>
         </p:txBody>
@@ -857,10 +678,6 @@
           <a:bodyPr/>
           <a:lstStyle/>
           <a:p>
-            <a:r>
-              <a:rPr lang="en-US" dirty="0"/>
-              <a:t/>
-            </a:r>
             <a:endParaRPr lang="en-US" dirty="0"/>
           </a:p>
         </p:txBody>
@@ -945,10 +762,6 @@
           <a:bodyPr/>
           <a:lstStyle/>
           <a:p>
-            <a:r>
-              <a:rPr lang="en-US" dirty="0"/>
-              <a:t/>
-            </a:r>
             <a:endParaRPr lang="en-US" dirty="0"/>
           </a:p>
         </p:txBody>
@@ -1022,6 +835,11 @@
 <file path=ppt/slideMasters/slideMaster1.xml><?xml version="1.0" encoding="utf-8"?>
 <p:sldMaster xmlns:a="http://schemas.openxmlformats.org/drawingml/2006/main" xmlns:r="http://schemas.openxmlformats.org/officeDocument/2006/relationships" xmlns:p="http://schemas.openxmlformats.org/presentationml/2006/main">
   <p:cSld>
+    <p:bg>
+      <p:bgRef idx="1001">
+        <a:schemeClr val="bg1"/>
+      </p:bgRef>
+    </p:bg>
     <p:spTree>
       <p:nvGrpSpPr>
         <p:cNvPr id="1" name=""/>
@@ -1304,6 +1122,7 @@
         <a:solidFill>
           <a:srgbClr val="FFFFFF"/>
         </a:solidFill>
+        <a:effectLst/>
       </p:bgPr>
     </p:bg>
     <p:spTree>
@@ -1344,6 +1163,13 @@
             <a:prstDash val="solid"/>
           </a:ln>
         </p:spPr>
+        <p:txBody>
+          <a:bodyPr/>
+          <a:lstStyle/>
+          <a:p>
+            <a:endParaRPr lang="it-IT"/>
+          </a:p>
+        </p:txBody>
       </p:sp>
       <p:sp>
         <p:nvSpPr>
@@ -1369,6 +1195,13 @@
             <a:prstDash val="solid"/>
           </a:ln>
         </p:spPr>
+        <p:txBody>
+          <a:bodyPr/>
+          <a:lstStyle/>
+          <a:p>
+            <a:endParaRPr lang="it-IT"/>
+          </a:p>
+        </p:txBody>
       </p:sp>
       <p:sp>
         <p:nvSpPr>
@@ -1391,11 +1224,11 @@
           <a:bodyPr wrap="square" lIns="0" tIns="0" rIns="0" bIns="0" rtlCol="0" anchor="ctr"/>
           <a:lstStyle/>
           <a:p>
-            <a:pPr indent="0" marL="0">
-              <a:buNone/>
-            </a:pPr>
-            <a:r>
-              <a:rPr lang="en-US" sz="850" spc="150" kern="0" dirty="0">
+            <a:pPr marL="0" indent="0">
+              <a:buNone/>
+            </a:pPr>
+            <a:r>
+              <a:rPr lang="en-US" sz="850" kern="0" spc="150" dirty="0">
                 <a:solidFill>
                   <a:srgbClr val="999999"/>
                 </a:solidFill>
@@ -1430,7 +1263,7 @@
           <a:bodyPr wrap="square" lIns="0" tIns="0" rIns="0" bIns="0" rtlCol="0" anchor="ctr"/>
           <a:lstStyle/>
           <a:p>
-            <a:pPr indent="0" marL="0">
+            <a:pPr marL="0" indent="0">
               <a:buNone/>
             </a:pPr>
             <a:r>
@@ -1469,7 +1302,7 @@
           <a:bodyPr wrap="square" lIns="0" tIns="0" rIns="0" bIns="0" rtlCol="0" anchor="ctr"/>
           <a:lstStyle/>
           <a:p>
-            <a:pPr indent="0" marL="0">
+            <a:pPr marL="0" indent="0">
               <a:buNone/>
             </a:pPr>
             <a:r>
@@ -1511,6 +1344,13 @@
             <a:prstDash val="solid"/>
           </a:ln>
         </p:spPr>
+        <p:txBody>
+          <a:bodyPr/>
+          <a:lstStyle/>
+          <a:p>
+            <a:endParaRPr lang="it-IT"/>
+          </a:p>
+        </p:txBody>
       </p:sp>
       <p:sp>
         <p:nvSpPr>
@@ -1533,7 +1373,7 @@
           <a:bodyPr wrap="square" lIns="0" tIns="0" rIns="0" bIns="0" rtlCol="0" anchor="ctr"/>
           <a:lstStyle/>
           <a:p>
-            <a:pPr indent="0" marL="0">
+            <a:pPr marL="0" indent="0">
               <a:buNone/>
             </a:pPr>
             <a:r>
@@ -1550,7 +1390,7 @@
             <a:endParaRPr lang="en-US" sz="1450" dirty="0"/>
           </a:p>
           <a:p>
-            <a:pPr indent="0" marL="0">
+            <a:pPr marL="0" indent="0">
               <a:buNone/>
             </a:pPr>
             <a:r>
@@ -1589,7 +1429,7 @@
           <a:bodyPr wrap="square" lIns="0" tIns="0" rIns="0" bIns="0" rtlCol="0" anchor="ctr"/>
           <a:lstStyle/>
           <a:p>
-            <a:pPr algn="r" indent="0" marL="0">
+            <a:pPr marL="0" indent="0" algn="r">
               <a:buNone/>
             </a:pPr>
             <a:r>
@@ -1628,7 +1468,7 @@
           <a:bodyPr wrap="square" lIns="0" tIns="0" rIns="0" bIns="0" rtlCol="0" anchor="ctr"/>
           <a:lstStyle/>
           <a:p>
-            <a:pPr algn="r" indent="0" marL="0">
+            <a:pPr marL="0" indent="0" algn="r">
               <a:buNone/>
             </a:pPr>
             <a:r>
@@ -1670,6 +1510,13 @@
             <a:prstDash val="solid"/>
           </a:ln>
         </p:spPr>
+        <p:txBody>
+          <a:bodyPr/>
+          <a:lstStyle/>
+          <a:p>
+            <a:endParaRPr lang="it-IT"/>
+          </a:p>
+        </p:txBody>
       </p:sp>
       <p:sp>
         <p:nvSpPr>
@@ -1692,7 +1539,7 @@
           <a:bodyPr wrap="square" lIns="0" tIns="0" rIns="0" bIns="0" rtlCol="0" anchor="ctr"/>
           <a:lstStyle/>
           <a:p>
-            <a:pPr indent="0" marL="0">
+            <a:pPr marL="0" indent="0">
               <a:buNone/>
             </a:pPr>
             <a:r>
@@ -1731,7 +1578,7 @@
           <a:bodyPr wrap="square" lIns="0" tIns="0" rIns="0" bIns="0" rtlCol="0" anchor="ctr"/>
           <a:lstStyle/>
           <a:p>
-            <a:pPr indent="0" marL="0">
+            <a:pPr marL="0" indent="0">
               <a:buNone/>
             </a:pPr>
             <a:r>
@@ -1773,6 +1620,13 @@
             <a:prstDash val="solid"/>
           </a:ln>
         </p:spPr>
+        <p:txBody>
+          <a:bodyPr/>
+          <a:lstStyle/>
+          <a:p>
+            <a:endParaRPr lang="it-IT"/>
+          </a:p>
+        </p:txBody>
       </p:sp>
       <p:sp>
         <p:nvSpPr>
@@ -1795,7 +1649,7 @@
           <a:bodyPr wrap="square" lIns="0" tIns="0" rIns="0" bIns="0" rtlCol="0" anchor="ctr"/>
           <a:lstStyle/>
           <a:p>
-            <a:pPr indent="0" marL="0">
+            <a:pPr marL="0" indent="0">
               <a:buNone/>
             </a:pPr>
             <a:r>
@@ -1834,7 +1688,7 @@
           <a:bodyPr wrap="square" lIns="0" tIns="0" rIns="0" bIns="0" rtlCol="0" anchor="ctr"/>
           <a:lstStyle/>
           <a:p>
-            <a:pPr indent="0" marL="0">
+            <a:pPr marL="0" indent="0">
               <a:buNone/>
             </a:pPr>
             <a:r>
@@ -1876,6 +1730,13 @@
             <a:prstDash val="solid"/>
           </a:ln>
         </p:spPr>
+        <p:txBody>
+          <a:bodyPr/>
+          <a:lstStyle/>
+          <a:p>
+            <a:endParaRPr lang="it-IT"/>
+          </a:p>
+        </p:txBody>
       </p:sp>
       <p:sp>
         <p:nvSpPr>
@@ -1898,7 +1759,7 @@
           <a:bodyPr wrap="square" lIns="0" tIns="0" rIns="0" bIns="0" rtlCol="0" anchor="ctr"/>
           <a:lstStyle/>
           <a:p>
-            <a:pPr indent="0" marL="0">
+            <a:pPr marL="0" indent="0">
               <a:buNone/>
             </a:pPr>
             <a:r>
@@ -1937,7 +1798,7 @@
           <a:bodyPr wrap="square" lIns="0" tIns="0" rIns="0" bIns="0" rtlCol="0" anchor="ctr"/>
           <a:lstStyle/>
           <a:p>
-            <a:pPr indent="0" marL="0">
+            <a:pPr marL="0" indent="0">
               <a:buNone/>
             </a:pPr>
             <a:r>
@@ -1979,6 +1840,13 @@
             <a:prstDash val="solid"/>
           </a:ln>
         </p:spPr>
+        <p:txBody>
+          <a:bodyPr/>
+          <a:lstStyle/>
+          <a:p>
+            <a:endParaRPr lang="it-IT"/>
+          </a:p>
+        </p:txBody>
       </p:sp>
       <p:sp>
         <p:nvSpPr>
@@ -2001,7 +1869,7 @@
           <a:bodyPr wrap="square" lIns="0" tIns="0" rIns="0" bIns="0" rtlCol="0" anchor="ctr"/>
           <a:lstStyle/>
           <a:p>
-            <a:pPr indent="0" marL="0">
+            <a:pPr marL="0" indent="0">
               <a:buNone/>
             </a:pPr>
             <a:r>
@@ -2012,9 +1880,6 @@
               </a:rPr>
               <a:t>Conway to LangGraph  ·  University of Bologna</a:t>
             </a:r>
-            <a:pPr indent="0" marL="0">
-              <a:buNone/>
-            </a:pPr>
             <a:r>
               <a:rPr lang="en-US" sz="800" dirty="0">
                 <a:solidFill>
@@ -2023,9 +1888,6 @@
               </a:rPr>
               <a:t>   |   </a:t>
             </a:r>
-            <a:pPr indent="0" marL="0">
-              <a:buNone/>
-            </a:pPr>
             <a:r>
               <a:rPr lang="en-US" sz="800" b="1" dirty="0">
                 <a:solidFill>
@@ -2054,6 +1916,7 @@
         <a:solidFill>
           <a:srgbClr val="FFFFFF"/>
         </a:solidFill>
+        <a:effectLst/>
       </p:bgPr>
     </p:bg>
     <p:spTree>
@@ -2094,6 +1957,13 @@
             <a:prstDash val="solid"/>
           </a:ln>
         </p:spPr>
+        <p:txBody>
+          <a:bodyPr/>
+          <a:lstStyle/>
+          <a:p>
+            <a:endParaRPr lang="it-IT"/>
+          </a:p>
+        </p:txBody>
       </p:sp>
       <p:sp>
         <p:nvSpPr>
@@ -2116,11 +1986,11 @@
           <a:bodyPr wrap="square" lIns="0" tIns="0" rIns="0" bIns="0" rtlCol="0" anchor="ctr"/>
           <a:lstStyle/>
           <a:p>
-            <a:pPr indent="0" marL="0">
-              <a:buNone/>
-            </a:pPr>
-            <a:r>
-              <a:rPr lang="en-US" sz="750" spc="200" kern="0" dirty="0">
+            <a:pPr marL="0" indent="0">
+              <a:buNone/>
+            </a:pPr>
+            <a:r>
+              <a:rPr lang="en-US" sz="750" kern="0" spc="200" dirty="0">
                 <a:solidFill>
                   <a:srgbClr val="999999"/>
                 </a:solidFill>
@@ -2155,7 +2025,7 @@
           <a:bodyPr wrap="square" lIns="0" tIns="0" rIns="0" bIns="0" rtlCol="0" anchor="ctr"/>
           <a:lstStyle/>
           <a:p>
-            <a:pPr indent="0" marL="0">
+            <a:pPr marL="0" indent="0">
               <a:buNone/>
             </a:pPr>
             <a:r>
@@ -2197,6 +2067,13 @@
             <a:prstDash val="solid"/>
           </a:ln>
         </p:spPr>
+        <p:txBody>
+          <a:bodyPr/>
+          <a:lstStyle/>
+          <a:p>
+            <a:endParaRPr lang="it-IT"/>
+          </a:p>
+        </p:txBody>
       </p:sp>
       <p:sp>
         <p:nvSpPr>
@@ -2222,6 +2099,13 @@
             <a:prstDash val="solid"/>
           </a:ln>
         </p:spPr>
+        <p:txBody>
+          <a:bodyPr/>
+          <a:lstStyle/>
+          <a:p>
+            <a:endParaRPr lang="it-IT"/>
+          </a:p>
+        </p:txBody>
       </p:sp>
       <p:sp>
         <p:nvSpPr>
@@ -2244,7 +2128,7 @@
           <a:bodyPr wrap="square" lIns="0" tIns="0" rIns="0" bIns="0" rtlCol="0" anchor="ctr"/>
           <a:lstStyle/>
           <a:p>
-            <a:pPr algn="ctr" indent="0" marL="0">
+            <a:pPr marL="0" indent="0" algn="ctr">
               <a:buNone/>
             </a:pPr>
             <a:r>
@@ -2283,7 +2167,7 @@
           <a:bodyPr wrap="square" lIns="0" tIns="0" rIns="0" bIns="0" rtlCol="0" anchor="ctr"/>
           <a:lstStyle/>
           <a:p>
-            <a:pPr indent="0" marL="0">
+            <a:pPr marL="0" indent="0">
               <a:buNone/>
             </a:pPr>
             <a:r>
@@ -2322,7 +2206,7 @@
           <a:bodyPr wrap="square" lIns="0" tIns="0" rIns="0" bIns="0" rtlCol="0" anchor="ctr"/>
           <a:lstStyle/>
           <a:p>
-            <a:pPr indent="0" marL="0">
+            <a:pPr marL="0" indent="0">
               <a:buNone/>
             </a:pPr>
             <a:r>
@@ -2364,6 +2248,13 @@
             <a:prstDash val="solid"/>
           </a:ln>
         </p:spPr>
+        <p:txBody>
+          <a:bodyPr/>
+          <a:lstStyle/>
+          <a:p>
+            <a:endParaRPr lang="it-IT"/>
+          </a:p>
+        </p:txBody>
       </p:sp>
       <p:sp>
         <p:nvSpPr>
@@ -2386,7 +2277,7 @@
           <a:bodyPr wrap="square" lIns="0" tIns="0" rIns="0" bIns="0" rtlCol="0" anchor="ctr"/>
           <a:lstStyle/>
           <a:p>
-            <a:pPr algn="ctr" indent="0" marL="0">
+            <a:pPr marL="0" indent="0" algn="ctr">
               <a:buNone/>
             </a:pPr>
             <a:r>
@@ -2425,7 +2316,7 @@
           <a:bodyPr wrap="square" lIns="0" tIns="0" rIns="0" bIns="0" rtlCol="0" anchor="ctr"/>
           <a:lstStyle/>
           <a:p>
-            <a:pPr indent="0" marL="0">
+            <a:pPr marL="0" indent="0">
               <a:buNone/>
             </a:pPr>
             <a:r>
@@ -2464,7 +2355,7 @@
           <a:bodyPr wrap="square" lIns="0" tIns="0" rIns="0" bIns="0" rtlCol="0" anchor="ctr"/>
           <a:lstStyle/>
           <a:p>
-            <a:pPr indent="0" marL="0">
+            <a:pPr marL="0" indent="0">
               <a:buNone/>
             </a:pPr>
             <a:r>
@@ -2506,6 +2397,13 @@
             <a:prstDash val="solid"/>
           </a:ln>
         </p:spPr>
+        <p:txBody>
+          <a:bodyPr/>
+          <a:lstStyle/>
+          <a:p>
+            <a:endParaRPr lang="it-IT"/>
+          </a:p>
+        </p:txBody>
       </p:sp>
       <p:sp>
         <p:nvSpPr>
@@ -2528,7 +2426,7 @@
           <a:bodyPr wrap="square" lIns="0" tIns="0" rIns="0" bIns="0" rtlCol="0" anchor="ctr"/>
           <a:lstStyle/>
           <a:p>
-            <a:pPr algn="ctr" indent="0" marL="0">
+            <a:pPr marL="0" indent="0" algn="ctr">
               <a:buNone/>
             </a:pPr>
             <a:r>
@@ -2567,7 +2465,7 @@
           <a:bodyPr wrap="square" lIns="0" tIns="0" rIns="0" bIns="0" rtlCol="0" anchor="ctr"/>
           <a:lstStyle/>
           <a:p>
-            <a:pPr indent="0" marL="0">
+            <a:pPr marL="0" indent="0">
               <a:buNone/>
             </a:pPr>
             <a:r>
@@ -2606,7 +2504,7 @@
           <a:bodyPr wrap="square" lIns="0" tIns="0" rIns="0" bIns="0" rtlCol="0" anchor="ctr"/>
           <a:lstStyle/>
           <a:p>
-            <a:pPr indent="0" marL="0">
+            <a:pPr marL="0" indent="0">
               <a:buNone/>
             </a:pPr>
             <a:r>
@@ -2648,6 +2546,13 @@
             <a:prstDash val="solid"/>
           </a:ln>
         </p:spPr>
+        <p:txBody>
+          <a:bodyPr/>
+          <a:lstStyle/>
+          <a:p>
+            <a:endParaRPr lang="it-IT"/>
+          </a:p>
+        </p:txBody>
       </p:sp>
       <p:sp>
         <p:nvSpPr>
@@ -2670,7 +2575,7 @@
           <a:bodyPr wrap="square" lIns="0" tIns="0" rIns="0" bIns="0" rtlCol="0" anchor="ctr"/>
           <a:lstStyle/>
           <a:p>
-            <a:pPr algn="ctr" indent="0" marL="0">
+            <a:pPr marL="0" indent="0" algn="ctr">
               <a:buNone/>
             </a:pPr>
             <a:r>
@@ -2709,7 +2614,7 @@
           <a:bodyPr wrap="square" lIns="0" tIns="0" rIns="0" bIns="0" rtlCol="0" anchor="ctr"/>
           <a:lstStyle/>
           <a:p>
-            <a:pPr indent="0" marL="0">
+            <a:pPr marL="0" indent="0">
               <a:buNone/>
             </a:pPr>
             <a:r>
@@ -2748,7 +2653,7 @@
           <a:bodyPr wrap="square" lIns="0" tIns="0" rIns="0" bIns="0" rtlCol="0" anchor="ctr"/>
           <a:lstStyle/>
           <a:p>
-            <a:pPr indent="0" marL="0">
+            <a:pPr marL="0" indent="0">
               <a:buNone/>
             </a:pPr>
             <a:r>
@@ -2768,14 +2673,14 @@
       </p:sp>
       <p:pic>
         <p:nvPicPr>
-          <p:cNvPr id="22" name="Image 0" descr="preencoded.png">    </p:cNvPr>
+          <p:cNvPr id="22" name="Image 0" descr="preencoded.png"/>
           <p:cNvPicPr>
             <a:picLocks noChangeAspect="1"/>
           </p:cNvPicPr>
           <p:nvPr/>
         </p:nvPicPr>
         <p:blipFill>
-          <a:blip r:embed="rId1"/>
+          <a:blip r:embed="rId3"/>
           <a:stretch>
             <a:fillRect/>
           </a:stretch>
@@ -2811,7 +2716,7 @@
           <a:bodyPr wrap="square" lIns="0" tIns="0" rIns="0" bIns="0" rtlCol="0" anchor="ctr"/>
           <a:lstStyle/>
           <a:p>
-            <a:pPr algn="ctr" indent="0" marL="0">
+            <a:pPr marL="0" indent="0" algn="ctr">
               <a:buNone/>
             </a:pPr>
             <a:r>
@@ -2828,7 +2733,7 @@
             <a:endParaRPr lang="en-US" sz="750" dirty="0"/>
           </a:p>
           <a:p>
-            <a:pPr algn="ctr" indent="0" marL="0">
+            <a:pPr marL="0" indent="0" algn="ctr">
               <a:buNone/>
             </a:pPr>
             <a:r>
@@ -2870,6 +2775,13 @@
             <a:prstDash val="solid"/>
           </a:ln>
         </p:spPr>
+        <p:txBody>
+          <a:bodyPr/>
+          <a:lstStyle/>
+          <a:p>
+            <a:endParaRPr lang="it-IT"/>
+          </a:p>
+        </p:txBody>
       </p:sp>
       <p:sp>
         <p:nvSpPr>
@@ -2892,7 +2804,7 @@
           <a:bodyPr wrap="square" lIns="0" tIns="0" rIns="0" bIns="0" rtlCol="0" anchor="ctr"/>
           <a:lstStyle/>
           <a:p>
-            <a:pPr indent="0" marL="0">
+            <a:pPr marL="0" indent="0">
               <a:buNone/>
             </a:pPr>
             <a:r>
@@ -2903,9 +2815,6 @@
               </a:rPr>
               <a:t>Conway to LangGraph  ·  University of Bologna</a:t>
             </a:r>
-            <a:pPr indent="0" marL="0">
-              <a:buNone/>
-            </a:pPr>
             <a:r>
               <a:rPr lang="en-US" sz="800" dirty="0">
                 <a:solidFill>
@@ -2914,9 +2823,6 @@
               </a:rPr>
               <a:t>   |   </a:t>
             </a:r>
-            <a:pPr indent="0" marL="0">
-              <a:buNone/>
-            </a:pPr>
             <a:r>
               <a:rPr lang="en-US" sz="800" b="1" dirty="0">
                 <a:solidFill>
@@ -2945,6 +2851,7 @@
         <a:solidFill>
           <a:srgbClr val="FFFFFF"/>
         </a:solidFill>
+        <a:effectLst/>
       </p:bgPr>
     </p:bg>
     <p:spTree>
@@ -2985,6 +2892,13 @@
             <a:prstDash val="solid"/>
           </a:ln>
         </p:spPr>
+        <p:txBody>
+          <a:bodyPr/>
+          <a:lstStyle/>
+          <a:p>
+            <a:endParaRPr lang="it-IT"/>
+          </a:p>
+        </p:txBody>
       </p:sp>
       <p:sp>
         <p:nvSpPr>
@@ -3007,11 +2921,11 @@
           <a:bodyPr wrap="square" lIns="0" tIns="0" rIns="0" bIns="0" rtlCol="0" anchor="ctr"/>
           <a:lstStyle/>
           <a:p>
-            <a:pPr indent="0" marL="0">
-              <a:buNone/>
-            </a:pPr>
-            <a:r>
-              <a:rPr lang="en-US" sz="750" spc="200" kern="0" dirty="0">
+            <a:pPr marL="0" indent="0">
+              <a:buNone/>
+            </a:pPr>
+            <a:r>
+              <a:rPr lang="en-US" sz="750" kern="0" spc="200" dirty="0">
                 <a:solidFill>
                   <a:srgbClr val="999999"/>
                 </a:solidFill>
@@ -3046,7 +2960,7 @@
           <a:bodyPr wrap="square" lIns="0" tIns="0" rIns="0" bIns="0" rtlCol="0" anchor="ctr"/>
           <a:lstStyle/>
           <a:p>
-            <a:pPr indent="0" marL="0">
+            <a:pPr marL="0" indent="0">
               <a:buNone/>
             </a:pPr>
             <a:r>
@@ -3088,6 +3002,13 @@
             <a:prstDash val="solid"/>
           </a:ln>
         </p:spPr>
+        <p:txBody>
+          <a:bodyPr/>
+          <a:lstStyle/>
+          <a:p>
+            <a:endParaRPr lang="it-IT"/>
+          </a:p>
+        </p:txBody>
       </p:sp>
       <p:sp>
         <p:nvSpPr>
@@ -3113,6 +3034,13 @@
             <a:prstDash val="solid"/>
           </a:ln>
         </p:spPr>
+        <p:txBody>
+          <a:bodyPr/>
+          <a:lstStyle/>
+          <a:p>
+            <a:endParaRPr lang="it-IT"/>
+          </a:p>
+        </p:txBody>
       </p:sp>
       <p:sp>
         <p:nvSpPr>
@@ -3135,7 +3063,7 @@
           <a:bodyPr wrap="square" lIns="0" tIns="0" rIns="0" bIns="0" rtlCol="0" anchor="ctr"/>
           <a:lstStyle/>
           <a:p>
-            <a:pPr algn="ctr" indent="0" marL="0">
+            <a:pPr marL="0" indent="0" algn="ctr">
               <a:buNone/>
             </a:pPr>
             <a:r>
@@ -3174,7 +3102,7 @@
           <a:bodyPr wrap="square" lIns="0" tIns="0" rIns="0" bIns="0" rtlCol="0" anchor="ctr"/>
           <a:lstStyle/>
           <a:p>
-            <a:pPr algn="ctr" indent="0" marL="0">
+            <a:pPr marL="0" indent="0" algn="ctr">
               <a:buNone/>
             </a:pPr>
             <a:r>
@@ -3216,6 +3144,13 @@
             <a:prstDash val="solid"/>
           </a:ln>
         </p:spPr>
+        <p:txBody>
+          <a:bodyPr/>
+          <a:lstStyle/>
+          <a:p>
+            <a:endParaRPr lang="it-IT"/>
+          </a:p>
+        </p:txBody>
       </p:sp>
       <p:sp>
         <p:nvSpPr>
@@ -3238,7 +3173,7 @@
           <a:bodyPr wrap="square" lIns="0" tIns="0" rIns="0" bIns="0" rtlCol="0" anchor="ctr"/>
           <a:lstStyle/>
           <a:p>
-            <a:pPr algn="ctr" indent="0" marL="0">
+            <a:pPr marL="0" indent="0" algn="ctr">
               <a:buNone/>
             </a:pPr>
             <a:r>
@@ -3277,7 +3212,7 @@
           <a:bodyPr wrap="square" lIns="0" tIns="0" rIns="0" bIns="0" rtlCol="0" anchor="ctr"/>
           <a:lstStyle/>
           <a:p>
-            <a:pPr algn="ctr" indent="0" marL="0">
+            <a:pPr marL="0" indent="0" algn="ctr">
               <a:buNone/>
             </a:pPr>
             <a:r>
@@ -3316,7 +3251,7 @@
           <a:bodyPr wrap="square" lIns="0" tIns="0" rIns="0" bIns="0" rtlCol="0" anchor="ctr"/>
           <a:lstStyle/>
           <a:p>
-            <a:pPr algn="ctr" indent="0" marL="0">
+            <a:pPr marL="0" indent="0" algn="ctr">
               <a:buNone/>
             </a:pPr>
             <a:r>
@@ -3355,7 +3290,7 @@
           <a:bodyPr wrap="square" lIns="0" tIns="0" rIns="0" bIns="0" rtlCol="0" anchor="ctr"/>
           <a:lstStyle/>
           <a:p>
-            <a:pPr algn="ctr" indent="0" marL="0">
+            <a:pPr marL="0" indent="0" algn="ctr">
               <a:buNone/>
             </a:pPr>
             <a:r>
@@ -3397,6 +3332,13 @@
             <a:prstDash val="solid"/>
           </a:ln>
         </p:spPr>
+        <p:txBody>
+          <a:bodyPr/>
+          <a:lstStyle/>
+          <a:p>
+            <a:endParaRPr lang="it-IT"/>
+          </a:p>
+        </p:txBody>
       </p:sp>
       <p:sp>
         <p:nvSpPr>
@@ -3422,6 +3364,13 @@
             <a:prstDash val="solid"/>
           </a:ln>
         </p:spPr>
+        <p:txBody>
+          <a:bodyPr/>
+          <a:lstStyle/>
+          <a:p>
+            <a:endParaRPr lang="it-IT"/>
+          </a:p>
+        </p:txBody>
       </p:sp>
       <p:sp>
         <p:nvSpPr>
@@ -3444,7 +3393,7 @@
           <a:bodyPr wrap="square" lIns="0" tIns="0" rIns="0" bIns="0" rtlCol="0" anchor="ctr"/>
           <a:lstStyle/>
           <a:p>
-            <a:pPr indent="0" marL="0">
+            <a:pPr marL="0" indent="0">
               <a:buNone/>
             </a:pPr>
             <a:r>
@@ -3483,7 +3432,7 @@
           <a:bodyPr wrap="square" lIns="0" tIns="0" rIns="0" bIns="0" rtlCol="0" anchor="ctr"/>
           <a:lstStyle/>
           <a:p>
-            <a:pPr indent="0" marL="0">
+            <a:pPr marL="0" indent="0">
               <a:buNone/>
             </a:pPr>
             <a:r>
@@ -3522,7 +3471,7 @@
           <a:bodyPr wrap="square" lIns="0" tIns="0" rIns="0" bIns="0" rtlCol="0" anchor="ctr"/>
           <a:lstStyle/>
           <a:p>
-            <a:pPr indent="0" marL="0">
+            <a:pPr marL="0" indent="0">
               <a:buNone/>
             </a:pPr>
             <a:r>
@@ -3564,6 +3513,13 @@
             <a:prstDash val="solid"/>
           </a:ln>
         </p:spPr>
+        <p:txBody>
+          <a:bodyPr/>
+          <a:lstStyle/>
+          <a:p>
+            <a:endParaRPr lang="it-IT"/>
+          </a:p>
+        </p:txBody>
       </p:sp>
       <p:sp>
         <p:nvSpPr>
@@ -3589,6 +3545,13 @@
             <a:prstDash val="solid"/>
           </a:ln>
         </p:spPr>
+        <p:txBody>
+          <a:bodyPr/>
+          <a:lstStyle/>
+          <a:p>
+            <a:endParaRPr lang="it-IT"/>
+          </a:p>
+        </p:txBody>
       </p:sp>
       <p:sp>
         <p:nvSpPr>
@@ -3611,7 +3574,7 @@
           <a:bodyPr wrap="square" lIns="0" tIns="0" rIns="0" bIns="0" rtlCol="0" anchor="ctr"/>
           <a:lstStyle/>
           <a:p>
-            <a:pPr indent="0" marL="0">
+            <a:pPr marL="0" indent="0">
               <a:buNone/>
             </a:pPr>
             <a:r>
@@ -3650,7 +3613,7 @@
           <a:bodyPr wrap="square" lIns="0" tIns="0" rIns="0" bIns="0" rtlCol="0" anchor="ctr"/>
           <a:lstStyle/>
           <a:p>
-            <a:pPr indent="0" marL="0">
+            <a:pPr marL="0" indent="0">
               <a:buNone/>
             </a:pPr>
             <a:r>
@@ -3689,7 +3652,7 @@
           <a:bodyPr wrap="square" lIns="0" tIns="0" rIns="0" bIns="0" rtlCol="0" anchor="ctr"/>
           <a:lstStyle/>
           <a:p>
-            <a:pPr indent="0" marL="0">
+            <a:pPr marL="0" indent="0">
               <a:buNone/>
             </a:pPr>
             <a:r>
@@ -3731,6 +3694,13 @@
             <a:prstDash val="solid"/>
           </a:ln>
         </p:spPr>
+        <p:txBody>
+          <a:bodyPr/>
+          <a:lstStyle/>
+          <a:p>
+            <a:endParaRPr lang="it-IT"/>
+          </a:p>
+        </p:txBody>
       </p:sp>
       <p:sp>
         <p:nvSpPr>
@@ -3756,6 +3726,13 @@
             <a:prstDash val="solid"/>
           </a:ln>
         </p:spPr>
+        <p:txBody>
+          <a:bodyPr/>
+          <a:lstStyle/>
+          <a:p>
+            <a:endParaRPr lang="it-IT"/>
+          </a:p>
+        </p:txBody>
       </p:sp>
       <p:sp>
         <p:nvSpPr>
@@ -3778,7 +3755,7 @@
           <a:bodyPr wrap="square" lIns="0" tIns="0" rIns="0" bIns="0" rtlCol="0" anchor="ctr"/>
           <a:lstStyle/>
           <a:p>
-            <a:pPr indent="0" marL="0">
+            <a:pPr marL="0" indent="0">
               <a:buNone/>
             </a:pPr>
             <a:r>
@@ -3817,7 +3794,7 @@
           <a:bodyPr wrap="square" lIns="0" tIns="0" rIns="0" bIns="0" rtlCol="0" anchor="ctr"/>
           <a:lstStyle/>
           <a:p>
-            <a:pPr indent="0" marL="0">
+            <a:pPr marL="0" indent="0">
               <a:buNone/>
             </a:pPr>
             <a:r>
@@ -3856,7 +3833,7 @@
           <a:bodyPr wrap="square" lIns="0" tIns="0" rIns="0" bIns="0" rtlCol="0" anchor="ctr"/>
           <a:lstStyle/>
           <a:p>
-            <a:pPr indent="0" marL="0">
+            <a:pPr marL="0" indent="0">
               <a:buNone/>
             </a:pPr>
             <a:r>
@@ -3898,6 +3875,13 @@
             <a:prstDash val="solid"/>
           </a:ln>
         </p:spPr>
+        <p:txBody>
+          <a:bodyPr/>
+          <a:lstStyle/>
+          <a:p>
+            <a:endParaRPr lang="it-IT"/>
+          </a:p>
+        </p:txBody>
       </p:sp>
       <p:sp>
         <p:nvSpPr>
@@ -3920,7 +3904,7 @@
           <a:bodyPr wrap="square" lIns="0" tIns="0" rIns="0" bIns="0" rtlCol="0" anchor="ctr"/>
           <a:lstStyle/>
           <a:p>
-            <a:pPr indent="0" marL="0">
+            <a:pPr marL="0" indent="0">
               <a:buNone/>
             </a:pPr>
             <a:r>
@@ -3931,9 +3915,6 @@
               </a:rPr>
               <a:t>Conway to LangGraph  ·  University of Bologna</a:t>
             </a:r>
-            <a:pPr indent="0" marL="0">
-              <a:buNone/>
-            </a:pPr>
             <a:r>
               <a:rPr lang="en-US" sz="800" dirty="0">
                 <a:solidFill>
@@ -3942,9 +3923,6 @@
               </a:rPr>
               <a:t>   |   </a:t>
             </a:r>
-            <a:pPr indent="0" marL="0">
-              <a:buNone/>
-            </a:pPr>
             <a:r>
               <a:rPr lang="en-US" sz="800" b="1" dirty="0">
                 <a:solidFill>
@@ -3973,6 +3951,7 @@
         <a:solidFill>
           <a:srgbClr val="FFFFFF"/>
         </a:solidFill>
+        <a:effectLst/>
       </p:bgPr>
     </p:bg>
     <p:spTree>
@@ -4013,6 +3992,13 @@
             <a:prstDash val="solid"/>
           </a:ln>
         </p:spPr>
+        <p:txBody>
+          <a:bodyPr/>
+          <a:lstStyle/>
+          <a:p>
+            <a:endParaRPr lang="it-IT"/>
+          </a:p>
+        </p:txBody>
       </p:sp>
       <p:sp>
         <p:nvSpPr>
@@ -4035,11 +4021,11 @@
           <a:bodyPr wrap="square" lIns="0" tIns="0" rIns="0" bIns="0" rtlCol="0" anchor="ctr"/>
           <a:lstStyle/>
           <a:p>
-            <a:pPr indent="0" marL="0">
-              <a:buNone/>
-            </a:pPr>
-            <a:r>
-              <a:rPr lang="en-US" sz="750" spc="200" kern="0" dirty="0">
+            <a:pPr marL="0" indent="0">
+              <a:buNone/>
+            </a:pPr>
+            <a:r>
+              <a:rPr lang="en-US" sz="750" kern="0" spc="200" dirty="0">
                 <a:solidFill>
                   <a:srgbClr val="999999"/>
                 </a:solidFill>
@@ -4074,7 +4060,7 @@
           <a:bodyPr wrap="square" lIns="0" tIns="0" rIns="0" bIns="0" rtlCol="0" anchor="ctr"/>
           <a:lstStyle/>
           <a:p>
-            <a:pPr indent="0" marL="0">
+            <a:pPr marL="0" indent="0">
               <a:buNone/>
             </a:pPr>
             <a:r>
@@ -4116,6 +4102,13 @@
             <a:prstDash val="solid"/>
           </a:ln>
         </p:spPr>
+        <p:txBody>
+          <a:bodyPr/>
+          <a:lstStyle/>
+          <a:p>
+            <a:endParaRPr lang="it-IT"/>
+          </a:p>
+        </p:txBody>
       </p:sp>
       <p:sp>
         <p:nvSpPr>
@@ -4138,7 +4131,7 @@
           <a:bodyPr wrap="square" lIns="0" tIns="0" rIns="0" bIns="0" rtlCol="0" anchor="ctr"/>
           <a:lstStyle/>
           <a:p>
-            <a:pPr indent="0" marL="0">
+            <a:pPr marL="0" indent="0">
               <a:buNone/>
             </a:pPr>
             <a:r>
@@ -4177,7 +4170,7 @@
           <a:bodyPr wrap="square" lIns="0" tIns="0" rIns="0" bIns="0" rtlCol="0" anchor="ctr"/>
           <a:lstStyle/>
           <a:p>
-            <a:pPr indent="0" marL="0">
+            <a:pPr marL="0" indent="0">
               <a:buNone/>
             </a:pPr>
             <a:r>
@@ -4216,7 +4209,7 @@
           <a:bodyPr wrap="square" lIns="0" tIns="0" rIns="0" bIns="0" rtlCol="0" anchor="ctr"/>
           <a:lstStyle/>
           <a:p>
-            <a:pPr indent="0" marL="0">
+            <a:pPr marL="0" indent="0">
               <a:buNone/>
             </a:pPr>
             <a:r>
@@ -4255,7 +4248,7 @@
           <a:bodyPr wrap="square" lIns="0" tIns="0" rIns="0" bIns="0" rtlCol="0" anchor="ctr"/>
           <a:lstStyle/>
           <a:p>
-            <a:pPr indent="0" marL="0">
+            <a:pPr marL="0" indent="0">
               <a:buNone/>
             </a:pPr>
             <a:r>
@@ -4294,7 +4287,7 @@
           <a:bodyPr wrap="square" lIns="0" tIns="0" rIns="0" bIns="0" rtlCol="0" anchor="ctr"/>
           <a:lstStyle/>
           <a:p>
-            <a:pPr indent="0" marL="0">
+            <a:pPr marL="0" indent="0">
               <a:buNone/>
             </a:pPr>
             <a:r>
@@ -4333,7 +4326,7 @@
           <a:bodyPr wrap="square" lIns="0" tIns="0" rIns="0" bIns="0" rtlCol="0" anchor="ctr"/>
           <a:lstStyle/>
           <a:p>
-            <a:pPr indent="0" marL="0">
+            <a:pPr marL="0" indent="0">
               <a:buNone/>
             </a:pPr>
             <a:r>
@@ -4372,7 +4365,7 @@
           <a:bodyPr wrap="square" lIns="0" tIns="0" rIns="0" bIns="0" rtlCol="0" anchor="ctr"/>
           <a:lstStyle/>
           <a:p>
-            <a:pPr indent="0" marL="0">
+            <a:pPr marL="0" indent="0">
               <a:buNone/>
             </a:pPr>
             <a:r>
@@ -4411,7 +4404,7 @@
           <a:bodyPr wrap="square" lIns="0" tIns="0" rIns="0" bIns="0" rtlCol="0" anchor="ctr"/>
           <a:lstStyle/>
           <a:p>
-            <a:pPr indent="0" marL="0">
+            <a:pPr marL="0" indent="0">
               <a:buNone/>
             </a:pPr>
             <a:r>
@@ -4453,6 +4446,13 @@
             <a:prstDash val="solid"/>
           </a:ln>
         </p:spPr>
+        <p:txBody>
+          <a:bodyPr/>
+          <a:lstStyle/>
+          <a:p>
+            <a:endParaRPr lang="it-IT"/>
+          </a:p>
+        </p:txBody>
       </p:sp>
       <p:sp>
         <p:nvSpPr>
@@ -4475,7 +4475,7 @@
           <a:bodyPr wrap="square" lIns="0" tIns="0" rIns="0" bIns="0" rtlCol="0" anchor="ctr"/>
           <a:lstStyle/>
           <a:p>
-            <a:pPr algn="ctr" indent="0" marL="0">
+            <a:pPr marL="0" indent="0" algn="ctr">
               <a:buNone/>
             </a:pPr>
             <a:r>
@@ -4489,9 +4489,6 @@
               </a:rPr>
               <a:t>MF predicts ~5–8%   </a:t>
             </a:r>
-            <a:pPr algn="ctr" indent="0" marL="0">
-              <a:buNone/>
-            </a:pPr>
             <a:r>
               <a:rPr lang="en-US" sz="1100" dirty="0">
                 <a:solidFill>
@@ -4503,9 +4500,6 @@
               </a:rPr>
               <a:t>vs.</a:t>
             </a:r>
-            <a:pPr algn="ctr" indent="0" marL="0">
-              <a:buNone/>
-            </a:pPr>
             <a:r>
               <a:rPr lang="en-US" sz="1100" b="1" dirty="0">
                 <a:solidFill>
@@ -4523,14 +4517,14 @@
       </p:sp>
       <p:pic>
         <p:nvPicPr>
-          <p:cNvPr id="16" name="Image 0" descr="preencoded.png">    </p:cNvPr>
+          <p:cNvPr id="16" name="Image 0" descr="preencoded.png"/>
           <p:cNvPicPr>
             <a:picLocks noChangeAspect="1"/>
           </p:cNvPicPr>
           <p:nvPr/>
         </p:nvPicPr>
         <p:blipFill>
-          <a:blip r:embed="rId1"/>
+          <a:blip r:embed="rId3"/>
           <a:stretch>
             <a:fillRect/>
           </a:stretch>
@@ -4566,7 +4560,7 @@
           <a:bodyPr wrap="square" lIns="0" tIns="0" rIns="0" bIns="0" rtlCol="0" anchor="ctr"/>
           <a:lstStyle/>
           <a:p>
-            <a:pPr algn="ctr" indent="0" marL="0">
+            <a:pPr marL="0" indent="0" algn="ctr">
               <a:buNone/>
             </a:pPr>
             <a:r>
@@ -4583,7 +4577,7 @@
             <a:endParaRPr lang="en-US" sz="800" dirty="0"/>
           </a:p>
           <a:p>
-            <a:pPr algn="ctr" indent="0" marL="0">
+            <a:pPr marL="0" indent="0" algn="ctr">
               <a:buNone/>
             </a:pPr>
             <a:r>
@@ -4622,7 +4616,7 @@
           <a:bodyPr wrap="square" lIns="0" tIns="0" rIns="0" bIns="0" rtlCol="0" anchor="ctr"/>
           <a:lstStyle/>
           <a:p>
-            <a:pPr indent="0" marL="0">
+            <a:pPr marL="0" indent="0">
               <a:buNone/>
             </a:pPr>
             <a:r>
@@ -4661,7 +4655,7 @@
           <a:bodyPr wrap="square" lIns="0" tIns="0" rIns="0" bIns="0" rtlCol="0" anchor="ctr"/>
           <a:lstStyle/>
           <a:p>
-            <a:pPr indent="0" marL="0">
+            <a:pPr marL="0" indent="0">
               <a:buNone/>
             </a:pPr>
             <a:r>
@@ -4675,9 +4669,6 @@
               </a:rPr>
               <a:t>→  </a:t>
             </a:r>
-            <a:pPr indent="0" marL="0">
-              <a:buNone/>
-            </a:pPr>
             <a:r>
               <a:rPr lang="en-US" sz="900" dirty="0">
                 <a:solidFill>
@@ -4714,7 +4705,7 @@
           <a:bodyPr wrap="square" lIns="0" tIns="0" rIns="0" bIns="0" rtlCol="0" anchor="ctr"/>
           <a:lstStyle/>
           <a:p>
-            <a:pPr indent="0" marL="0">
+            <a:pPr marL="0" indent="0">
               <a:buNone/>
             </a:pPr>
             <a:r>
@@ -4728,9 +4719,6 @@
               </a:rPr>
               <a:t>→  </a:t>
             </a:r>
-            <a:pPr indent="0" marL="0">
-              <a:buNone/>
-            </a:pPr>
             <a:r>
               <a:rPr lang="en-US" sz="900" dirty="0">
                 <a:solidFill>
@@ -4767,7 +4755,7 @@
           <a:bodyPr wrap="square" lIns="0" tIns="0" rIns="0" bIns="0" rtlCol="0" anchor="ctr"/>
           <a:lstStyle/>
           <a:p>
-            <a:pPr indent="0" marL="0">
+            <a:pPr marL="0" indent="0">
               <a:buNone/>
             </a:pPr>
             <a:r>
@@ -4781,9 +4769,6 @@
               </a:rPr>
               <a:t>→  </a:t>
             </a:r>
-            <a:pPr indent="0" marL="0">
-              <a:buNone/>
-            </a:pPr>
             <a:r>
               <a:rPr lang="en-US" sz="900" dirty="0">
                 <a:solidFill>
@@ -4823,6 +4808,13 @@
             <a:prstDash val="solid"/>
           </a:ln>
         </p:spPr>
+        <p:txBody>
+          <a:bodyPr/>
+          <a:lstStyle/>
+          <a:p>
+            <a:endParaRPr lang="it-IT"/>
+          </a:p>
+        </p:txBody>
       </p:sp>
       <p:sp>
         <p:nvSpPr>
@@ -4845,7 +4837,7 @@
           <a:bodyPr wrap="square" lIns="0" tIns="0" rIns="0" bIns="0" rtlCol="0" anchor="ctr"/>
           <a:lstStyle/>
           <a:p>
-            <a:pPr indent="0" marL="0">
+            <a:pPr marL="0" indent="0">
               <a:buNone/>
             </a:pPr>
             <a:r>
@@ -4856,9 +4848,6 @@
               </a:rPr>
               <a:t>Conway to LangGraph  ·  University of Bologna</a:t>
             </a:r>
-            <a:pPr indent="0" marL="0">
-              <a:buNone/>
-            </a:pPr>
             <a:r>
               <a:rPr lang="en-US" sz="800" dirty="0">
                 <a:solidFill>
@@ -4867,9 +4856,6 @@
               </a:rPr>
               <a:t>   |   </a:t>
             </a:r>
-            <a:pPr indent="0" marL="0">
-              <a:buNone/>
-            </a:pPr>
             <a:r>
               <a:rPr lang="en-US" sz="800" b="1" dirty="0">
                 <a:solidFill>
@@ -4879,6 +4865,205 @@
               <a:t>MEAN-FIELD vs REALITY</a:t>
             </a:r>
             <a:endParaRPr lang="en-US" sz="800" dirty="0"/>
+          </a:p>
+        </p:txBody>
+      </p:sp>
+      <p:grpSp>
+        <p:nvGrpSpPr>
+          <p:cNvPr id="28" name="Gruppo 27">
+            <a:extLst>
+              <a:ext uri="{FF2B5EF4-FFF2-40B4-BE49-F238E27FC236}">
+                <a16:creationId xmlns:a16="http://schemas.microsoft.com/office/drawing/2014/main" id="{FAD67FD4-054A-4A91-CD7E-A941B80716C2}"/>
+              </a:ext>
+            </a:extLst>
+          </p:cNvPr>
+          <p:cNvGrpSpPr/>
+          <p:nvPr/>
+        </p:nvGrpSpPr>
+        <p:grpSpPr>
+          <a:xfrm>
+            <a:off x="6129072" y="1294416"/>
+            <a:ext cx="1984680" cy="1683000"/>
+            <a:chOff x="6129072" y="1294416"/>
+            <a:chExt cx="1984680" cy="1683000"/>
+          </a:xfrm>
+        </p:grpSpPr>
+        <mc:AlternateContent xmlns:mc="http://schemas.openxmlformats.org/markup-compatibility/2006">
+          <mc:Choice xmlns:p14="http://schemas.microsoft.com/office/powerpoint/2010/main" Requires="p14">
+            <p:contentPart p14:bwMode="auto" r:id="rId4">
+              <p14:nvContentPartPr>
+                <p14:cNvPr id="25" name="Input penna 24">
+                  <a:extLst>
+                    <a:ext uri="{FF2B5EF4-FFF2-40B4-BE49-F238E27FC236}">
+                      <a16:creationId xmlns:a16="http://schemas.microsoft.com/office/drawing/2014/main" id="{B41AACC1-A410-5F76-B20E-9E962CDE52B5}"/>
+                    </a:ext>
+                  </a:extLst>
+                </p14:cNvPr>
+                <p14:cNvContentPartPr/>
+                <p14:nvPr/>
+              </p14:nvContentPartPr>
+              <p14:xfrm>
+                <a:off x="6129072" y="1294416"/>
+                <a:ext cx="1984680" cy="1143360"/>
+              </p14:xfrm>
+            </p:contentPart>
+          </mc:Choice>
+          <mc:Fallback>
+            <p:pic>
+              <p:nvPicPr>
+                <p:cNvPr id="25" name="Input penna 24">
+                  <a:extLst>
+                    <a:ext uri="{FF2B5EF4-FFF2-40B4-BE49-F238E27FC236}">
+                      <a16:creationId xmlns:a16="http://schemas.microsoft.com/office/drawing/2014/main" id="{B41AACC1-A410-5F76-B20E-9E962CDE52B5}"/>
+                    </a:ext>
+                  </a:extLst>
+                </p:cNvPr>
+                <p:cNvPicPr/>
+                <p:nvPr/>
+              </p:nvPicPr>
+              <p:blipFill>
+                <a:blip r:embed="rId5"/>
+                <a:stretch>
+                  <a:fillRect/>
+                </a:stretch>
+              </p:blipFill>
+              <p:spPr>
+                <a:xfrm>
+                  <a:off x="6120432" y="1285776"/>
+                  <a:ext cx="2002320" cy="1161000"/>
+                </a:xfrm>
+                <a:prstGeom prst="rect">
+                  <a:avLst/>
+                </a:prstGeom>
+              </p:spPr>
+            </p:pic>
+          </mc:Fallback>
+        </mc:AlternateContent>
+        <mc:AlternateContent xmlns:mc="http://schemas.openxmlformats.org/markup-compatibility/2006">
+          <mc:Choice xmlns:p14="http://schemas.microsoft.com/office/powerpoint/2010/main" Requires="p14">
+            <p:contentPart p14:bwMode="auto" r:id="rId6">
+              <p14:nvContentPartPr>
+                <p14:cNvPr id="26" name="Input penna 25">
+                  <a:extLst>
+                    <a:ext uri="{FF2B5EF4-FFF2-40B4-BE49-F238E27FC236}">
+                      <a16:creationId xmlns:a16="http://schemas.microsoft.com/office/drawing/2014/main" id="{7EA83FAA-9CE5-FBCC-285A-B789B99AFEB9}"/>
+                    </a:ext>
+                  </a:extLst>
+                </p14:cNvPr>
+                <p14:cNvContentPartPr/>
+                <p14:nvPr/>
+              </p14:nvContentPartPr>
+              <p14:xfrm>
+                <a:off x="6445512" y="1574496"/>
+                <a:ext cx="937800" cy="1402920"/>
+              </p14:xfrm>
+            </p:contentPart>
+          </mc:Choice>
+          <mc:Fallback>
+            <p:pic>
+              <p:nvPicPr>
+                <p:cNvPr id="26" name="Input penna 25">
+                  <a:extLst>
+                    <a:ext uri="{FF2B5EF4-FFF2-40B4-BE49-F238E27FC236}">
+                      <a16:creationId xmlns:a16="http://schemas.microsoft.com/office/drawing/2014/main" id="{7EA83FAA-9CE5-FBCC-285A-B789B99AFEB9}"/>
+                    </a:ext>
+                  </a:extLst>
+                </p:cNvPr>
+                <p:cNvPicPr/>
+                <p:nvPr/>
+              </p:nvPicPr>
+              <p:blipFill>
+                <a:blip r:embed="rId7"/>
+                <a:stretch>
+                  <a:fillRect/>
+                </a:stretch>
+              </p:blipFill>
+              <p:spPr>
+                <a:xfrm>
+                  <a:off x="6436512" y="1565496"/>
+                  <a:ext cx="955440" cy="1420560"/>
+                </a:xfrm>
+                <a:prstGeom prst="rect">
+                  <a:avLst/>
+                </a:prstGeom>
+              </p:spPr>
+            </p:pic>
+          </mc:Fallback>
+        </mc:AlternateContent>
+      </p:grpSp>
+      <p:sp>
+        <p:nvSpPr>
+          <p:cNvPr id="29" name="CasellaDiTesto 28">
+            <a:extLst>
+              <a:ext uri="{FF2B5EF4-FFF2-40B4-BE49-F238E27FC236}">
+                <a16:creationId xmlns:a16="http://schemas.microsoft.com/office/drawing/2014/main" id="{E340B9FC-7B33-7E9D-9CF3-4352DC802B9D}"/>
+              </a:ext>
+            </a:extLst>
+          </p:cNvPr>
+          <p:cNvSpPr txBox="1"/>
+          <p:nvPr/>
+        </p:nvSpPr>
+        <p:spPr>
+          <a:xfrm>
+            <a:off x="7946136" y="1682496"/>
+            <a:ext cx="990849" cy="369332"/>
+          </a:xfrm>
+          <a:prstGeom prst="rect">
+            <a:avLst/>
+          </a:prstGeom>
+          <a:noFill/>
+        </p:spPr>
+        <p:txBody>
+          <a:bodyPr wrap="none" rtlCol="0">
+            <a:spAutoFit/>
+          </a:bodyPr>
+          <a:lstStyle/>
+          <a:p>
+            <a:r>
+              <a:rPr lang="it-IT" dirty="0" err="1"/>
+              <a:t>Exercise</a:t>
+            </a:r>
+            <a:r>
+              <a:rPr lang="it-IT" dirty="0"/>
+              <a:t> </a:t>
+            </a:r>
+          </a:p>
+        </p:txBody>
+      </p:sp>
+      <p:sp>
+        <p:nvSpPr>
+          <p:cNvPr id="31" name="CasellaDiTesto 30">
+            <a:extLst>
+              <a:ext uri="{FF2B5EF4-FFF2-40B4-BE49-F238E27FC236}">
+                <a16:creationId xmlns:a16="http://schemas.microsoft.com/office/drawing/2014/main" id="{1E10DFBE-FB55-41B1-D31C-8E278CEFE476}"/>
+              </a:ext>
+            </a:extLst>
+          </p:cNvPr>
+          <p:cNvSpPr txBox="1"/>
+          <p:nvPr/>
+        </p:nvSpPr>
+        <p:spPr>
+          <a:xfrm>
+            <a:off x="1666064" y="2538460"/>
+            <a:ext cx="1605632" cy="369332"/>
+          </a:xfrm>
+          <a:prstGeom prst="rect">
+            <a:avLst/>
+          </a:prstGeom>
+          <a:solidFill>
+            <a:schemeClr val="accent2"/>
+          </a:solidFill>
+        </p:spPr>
+        <p:txBody>
+          <a:bodyPr wrap="none" rtlCol="0">
+            <a:spAutoFit/>
+          </a:bodyPr>
+          <a:lstStyle/>
+          <a:p>
+            <a:r>
+              <a:rPr lang="it-IT" dirty="0"/>
+              <a:t>See notebook !</a:t>
+            </a:r>
           </a:p>
         </p:txBody>
       </p:sp>
@@ -4898,6 +5083,7 @@
         <a:solidFill>
           <a:srgbClr val="FFFFFF"/>
         </a:solidFill>
+        <a:effectLst/>
       </p:bgPr>
     </p:bg>
     <p:spTree>
@@ -4938,6 +5124,13 @@
             <a:prstDash val="solid"/>
           </a:ln>
         </p:spPr>
+        <p:txBody>
+          <a:bodyPr/>
+          <a:lstStyle/>
+          <a:p>
+            <a:endParaRPr lang="it-IT"/>
+          </a:p>
+        </p:txBody>
       </p:sp>
       <p:sp>
         <p:nvSpPr>
@@ -4960,11 +5153,11 @@
           <a:bodyPr wrap="square" lIns="0" tIns="0" rIns="0" bIns="0" rtlCol="0" anchor="ctr"/>
           <a:lstStyle/>
           <a:p>
-            <a:pPr indent="0" marL="0">
-              <a:buNone/>
-            </a:pPr>
-            <a:r>
-              <a:rPr lang="en-US" sz="750" spc="200" kern="0" dirty="0">
+            <a:pPr marL="0" indent="0">
+              <a:buNone/>
+            </a:pPr>
+            <a:r>
+              <a:rPr lang="en-US" sz="750" kern="0" spc="200" dirty="0">
                 <a:solidFill>
                   <a:srgbClr val="999999"/>
                 </a:solidFill>
@@ -4999,7 +5192,7 @@
           <a:bodyPr wrap="square" lIns="0" tIns="0" rIns="0" bIns="0" rtlCol="0" anchor="ctr"/>
           <a:lstStyle/>
           <a:p>
-            <a:pPr indent="0" marL="0">
+            <a:pPr marL="0" indent="0">
               <a:buNone/>
             </a:pPr>
             <a:r>
@@ -5041,6 +5234,13 @@
             <a:prstDash val="solid"/>
           </a:ln>
         </p:spPr>
+        <p:txBody>
+          <a:bodyPr/>
+          <a:lstStyle/>
+          <a:p>
+            <a:endParaRPr lang="it-IT"/>
+          </a:p>
+        </p:txBody>
       </p:sp>
       <p:sp>
         <p:nvSpPr>
@@ -5066,6 +5266,13 @@
             <a:prstDash val="solid"/>
           </a:ln>
         </p:spPr>
+        <p:txBody>
+          <a:bodyPr/>
+          <a:lstStyle/>
+          <a:p>
+            <a:endParaRPr lang="it-IT"/>
+          </a:p>
+        </p:txBody>
       </p:sp>
       <p:sp>
         <p:nvSpPr>
@@ -5088,7 +5295,7 @@
           <a:bodyPr wrap="square" lIns="0" tIns="0" rIns="0" bIns="0" rtlCol="0" anchor="ctr"/>
           <a:lstStyle/>
           <a:p>
-            <a:pPr algn="ctr" indent="0" marL="0">
+            <a:pPr marL="0" indent="0" algn="ctr">
               <a:buNone/>
             </a:pPr>
             <a:r>
@@ -5127,7 +5334,7 @@
           <a:bodyPr wrap="square" lIns="0" tIns="0" rIns="0" bIns="0" rtlCol="0" anchor="ctr"/>
           <a:lstStyle/>
           <a:p>
-            <a:pPr indent="0" marL="0">
+            <a:pPr marL="0" indent="0">
               <a:buNone/>
             </a:pPr>
             <a:r>
@@ -5166,7 +5373,7 @@
           <a:bodyPr wrap="square" lIns="0" tIns="0" rIns="0" bIns="0" rtlCol="0" anchor="ctr"/>
           <a:lstStyle/>
           <a:p>
-            <a:pPr indent="0" marL="0">
+            <a:pPr marL="0" indent="0">
               <a:buNone/>
             </a:pPr>
             <a:r>
@@ -5205,7 +5412,7 @@
           <a:bodyPr wrap="square" lIns="0" tIns="0" rIns="0" bIns="0" rtlCol="0" anchor="ctr"/>
           <a:lstStyle/>
           <a:p>
-            <a:pPr algn="ctr" indent="0" marL="0">
+            <a:pPr marL="0" indent="0" algn="ctr">
               <a:buNone/>
             </a:pPr>
             <a:r>
@@ -5247,6 +5454,13 @@
             <a:prstDash val="solid"/>
           </a:ln>
         </p:spPr>
+        <p:txBody>
+          <a:bodyPr/>
+          <a:lstStyle/>
+          <a:p>
+            <a:endParaRPr lang="it-IT"/>
+          </a:p>
+        </p:txBody>
       </p:sp>
       <p:sp>
         <p:nvSpPr>
@@ -5269,7 +5483,7 @@
           <a:bodyPr wrap="square" lIns="0" tIns="0" rIns="0" bIns="0" rtlCol="0" anchor="ctr"/>
           <a:lstStyle/>
           <a:p>
-            <a:pPr algn="ctr" indent="0" marL="0">
+            <a:pPr marL="0" indent="0" algn="ctr">
               <a:buNone/>
             </a:pPr>
             <a:r>
@@ -5308,7 +5522,7 @@
           <a:bodyPr wrap="square" lIns="0" tIns="0" rIns="0" bIns="0" rtlCol="0" anchor="ctr"/>
           <a:lstStyle/>
           <a:p>
-            <a:pPr indent="0" marL="0">
+            <a:pPr marL="0" indent="0">
               <a:buNone/>
             </a:pPr>
             <a:r>
@@ -5347,7 +5561,7 @@
           <a:bodyPr wrap="square" lIns="0" tIns="0" rIns="0" bIns="0" rtlCol="0" anchor="ctr"/>
           <a:lstStyle/>
           <a:p>
-            <a:pPr indent="0" marL="0">
+            <a:pPr marL="0" indent="0">
               <a:buNone/>
             </a:pPr>
             <a:r>
@@ -5386,7 +5600,7 @@
           <a:bodyPr wrap="square" lIns="0" tIns="0" rIns="0" bIns="0" rtlCol="0" anchor="ctr"/>
           <a:lstStyle/>
           <a:p>
-            <a:pPr algn="ctr" indent="0" marL="0">
+            <a:pPr marL="0" indent="0" algn="ctr">
               <a:buNone/>
             </a:pPr>
             <a:r>
@@ -5428,6 +5642,13 @@
             <a:prstDash val="solid"/>
           </a:ln>
         </p:spPr>
+        <p:txBody>
+          <a:bodyPr/>
+          <a:lstStyle/>
+          <a:p>
+            <a:endParaRPr lang="it-IT"/>
+          </a:p>
+        </p:txBody>
       </p:sp>
       <p:sp>
         <p:nvSpPr>
@@ -5450,7 +5671,7 @@
           <a:bodyPr wrap="square" lIns="0" tIns="0" rIns="0" bIns="0" rtlCol="0" anchor="ctr"/>
           <a:lstStyle/>
           <a:p>
-            <a:pPr algn="ctr" indent="0" marL="0">
+            <a:pPr marL="0" indent="0" algn="ctr">
               <a:buNone/>
             </a:pPr>
             <a:r>
@@ -5489,7 +5710,7 @@
           <a:bodyPr wrap="square" lIns="0" tIns="0" rIns="0" bIns="0" rtlCol="0" anchor="ctr"/>
           <a:lstStyle/>
           <a:p>
-            <a:pPr indent="0" marL="0">
+            <a:pPr marL="0" indent="0">
               <a:buNone/>
             </a:pPr>
             <a:r>
@@ -5528,7 +5749,7 @@
           <a:bodyPr wrap="square" lIns="0" tIns="0" rIns="0" bIns="0" rtlCol="0" anchor="ctr"/>
           <a:lstStyle/>
           <a:p>
-            <a:pPr indent="0" marL="0">
+            <a:pPr marL="0" indent="0">
               <a:buNone/>
             </a:pPr>
             <a:r>
@@ -5567,7 +5788,7 @@
           <a:bodyPr wrap="square" lIns="0" tIns="0" rIns="0" bIns="0" rtlCol="0" anchor="ctr"/>
           <a:lstStyle/>
           <a:p>
-            <a:pPr algn="ctr" indent="0" marL="0">
+            <a:pPr marL="0" indent="0" algn="ctr">
               <a:buNone/>
             </a:pPr>
             <a:r>
@@ -5609,6 +5830,13 @@
             <a:prstDash val="solid"/>
           </a:ln>
         </p:spPr>
+        <p:txBody>
+          <a:bodyPr/>
+          <a:lstStyle/>
+          <a:p>
+            <a:endParaRPr lang="it-IT"/>
+          </a:p>
+        </p:txBody>
       </p:sp>
       <p:sp>
         <p:nvSpPr>
@@ -5631,7 +5859,7 @@
           <a:bodyPr wrap="square" lIns="0" tIns="0" rIns="0" bIns="0" rtlCol="0" anchor="ctr"/>
           <a:lstStyle/>
           <a:p>
-            <a:pPr algn="ctr" indent="0" marL="0">
+            <a:pPr marL="0" indent="0" algn="ctr">
               <a:buNone/>
             </a:pPr>
             <a:r>
@@ -5670,7 +5898,7 @@
           <a:bodyPr wrap="square" lIns="0" tIns="0" rIns="0" bIns="0" rtlCol="0" anchor="ctr"/>
           <a:lstStyle/>
           <a:p>
-            <a:pPr indent="0" marL="0">
+            <a:pPr marL="0" indent="0">
               <a:buNone/>
             </a:pPr>
             <a:r>
@@ -5709,7 +5937,7 @@
           <a:bodyPr wrap="square" lIns="0" tIns="0" rIns="0" bIns="0" rtlCol="0" anchor="ctr"/>
           <a:lstStyle/>
           <a:p>
-            <a:pPr indent="0" marL="0">
+            <a:pPr marL="0" indent="0">
               <a:buNone/>
             </a:pPr>
             <a:r>
@@ -5751,6 +5979,13 @@
             <a:prstDash val="solid"/>
           </a:ln>
         </p:spPr>
+        <p:txBody>
+          <a:bodyPr/>
+          <a:lstStyle/>
+          <a:p>
+            <a:endParaRPr lang="it-IT"/>
+          </a:p>
+        </p:txBody>
       </p:sp>
       <p:sp>
         <p:nvSpPr>
@@ -5773,7 +6008,7 @@
           <a:bodyPr wrap="square" lIns="0" tIns="0" rIns="0" bIns="0" rtlCol="0" anchor="ctr"/>
           <a:lstStyle/>
           <a:p>
-            <a:pPr indent="0" marL="0">
+            <a:pPr marL="0" indent="0">
               <a:buNone/>
             </a:pPr>
             <a:r>
@@ -5784,9 +6019,6 @@
               </a:rPr>
               <a:t>Conway to LangGraph  ·  University of Bologna</a:t>
             </a:r>
-            <a:pPr indent="0" marL="0">
-              <a:buNone/>
-            </a:pPr>
             <a:r>
               <a:rPr lang="en-US" sz="800" dirty="0">
                 <a:solidFill>
@@ -5795,9 +6027,6 @@
               </a:rPr>
               <a:t>   |   </a:t>
             </a:r>
-            <a:pPr indent="0" marL="0">
-              <a:buNone/>
-            </a:pPr>
             <a:r>
               <a:rPr lang="en-US" sz="800" b="1" dirty="0">
                 <a:solidFill>
@@ -5826,6 +6055,7 @@
         <a:solidFill>
           <a:srgbClr val="FFFFFF"/>
         </a:solidFill>
+        <a:effectLst/>
       </p:bgPr>
     </p:bg>
     <p:spTree>
@@ -5866,6 +6096,13 @@
             <a:prstDash val="solid"/>
           </a:ln>
         </p:spPr>
+        <p:txBody>
+          <a:bodyPr/>
+          <a:lstStyle/>
+          <a:p>
+            <a:endParaRPr lang="it-IT"/>
+          </a:p>
+        </p:txBody>
       </p:sp>
       <p:sp>
         <p:nvSpPr>
@@ -5888,11 +6125,11 @@
           <a:bodyPr wrap="square" lIns="0" tIns="0" rIns="0" bIns="0" rtlCol="0" anchor="ctr"/>
           <a:lstStyle/>
           <a:p>
-            <a:pPr indent="0" marL="0">
-              <a:buNone/>
-            </a:pPr>
-            <a:r>
-              <a:rPr lang="en-US" sz="750" spc="200" kern="0" dirty="0">
+            <a:pPr marL="0" indent="0">
+              <a:buNone/>
+            </a:pPr>
+            <a:r>
+              <a:rPr lang="en-US" sz="750" kern="0" spc="200" dirty="0">
                 <a:solidFill>
                   <a:srgbClr val="999999"/>
                 </a:solidFill>
@@ -5927,7 +6164,7 @@
           <a:bodyPr wrap="square" lIns="0" tIns="0" rIns="0" bIns="0" rtlCol="0" anchor="ctr"/>
           <a:lstStyle/>
           <a:p>
-            <a:pPr indent="0" marL="0">
+            <a:pPr marL="0" indent="0">
               <a:buNone/>
             </a:pPr>
             <a:r>
@@ -5969,6 +6206,13 @@
             <a:prstDash val="solid"/>
           </a:ln>
         </p:spPr>
+        <p:txBody>
+          <a:bodyPr/>
+          <a:lstStyle/>
+          <a:p>
+            <a:endParaRPr lang="it-IT"/>
+          </a:p>
+        </p:txBody>
       </p:sp>
       <p:sp>
         <p:nvSpPr>
@@ -5994,6 +6238,13 @@
             <a:prstDash val="solid"/>
           </a:ln>
         </p:spPr>
+        <p:txBody>
+          <a:bodyPr/>
+          <a:lstStyle/>
+          <a:p>
+            <a:endParaRPr lang="it-IT"/>
+          </a:p>
+        </p:txBody>
       </p:sp>
       <p:sp>
         <p:nvSpPr>
@@ -6019,6 +6270,13 @@
             <a:prstDash val="solid"/>
           </a:ln>
         </p:spPr>
+        <p:txBody>
+          <a:bodyPr/>
+          <a:lstStyle/>
+          <a:p>
+            <a:endParaRPr lang="it-IT"/>
+          </a:p>
+        </p:txBody>
       </p:sp>
       <p:sp>
         <p:nvSpPr>
@@ -6041,7 +6299,7 @@
           <a:bodyPr wrap="square" lIns="0" tIns="0" rIns="0" bIns="0" rtlCol="0" anchor="ctr"/>
           <a:lstStyle/>
           <a:p>
-            <a:pPr indent="0" marL="0">
+            <a:pPr marL="0" indent="0">
               <a:buNone/>
             </a:pPr>
             <a:r>
@@ -6080,7 +6338,7 @@
           <a:bodyPr wrap="square" lIns="0" tIns="0" rIns="0" bIns="0" rtlCol="0" anchor="ctr"/>
           <a:lstStyle/>
           <a:p>
-            <a:pPr indent="0" marL="0">
+            <a:pPr marL="0" indent="0">
               <a:buNone/>
             </a:pPr>
             <a:r>
@@ -6119,7 +6377,7 @@
           <a:bodyPr wrap="square" lIns="0" tIns="0" rIns="0" bIns="0" rtlCol="0" anchor="ctr"/>
           <a:lstStyle/>
           <a:p>
-            <a:pPr indent="0" marL="0">
+            <a:pPr marL="0" indent="0">
               <a:buNone/>
             </a:pPr>
             <a:r>
@@ -6158,7 +6416,7 @@
           <a:bodyPr wrap="square" lIns="0" tIns="0" rIns="0" bIns="0" rtlCol="0" anchor="ctr"/>
           <a:lstStyle/>
           <a:p>
-            <a:pPr indent="0" marL="0">
+            <a:pPr marL="0" indent="0">
               <a:buNone/>
             </a:pPr>
             <a:r>
@@ -6200,6 +6458,13 @@
             <a:prstDash val="solid"/>
           </a:ln>
         </p:spPr>
+        <p:txBody>
+          <a:bodyPr/>
+          <a:lstStyle/>
+          <a:p>
+            <a:endParaRPr lang="it-IT"/>
+          </a:p>
+        </p:txBody>
       </p:sp>
       <p:sp>
         <p:nvSpPr>
@@ -6225,6 +6490,13 @@
             <a:prstDash val="solid"/>
           </a:ln>
         </p:spPr>
+        <p:txBody>
+          <a:bodyPr/>
+          <a:lstStyle/>
+          <a:p>
+            <a:endParaRPr lang="it-IT"/>
+          </a:p>
+        </p:txBody>
       </p:sp>
       <p:sp>
         <p:nvSpPr>
@@ -6247,7 +6519,7 @@
           <a:bodyPr wrap="square" lIns="0" tIns="0" rIns="0" bIns="0" rtlCol="0" anchor="ctr"/>
           <a:lstStyle/>
           <a:p>
-            <a:pPr indent="0" marL="0">
+            <a:pPr marL="0" indent="0">
               <a:buNone/>
             </a:pPr>
             <a:r>
@@ -6286,7 +6558,7 @@
           <a:bodyPr wrap="square" lIns="0" tIns="0" rIns="0" bIns="0" rtlCol="0" anchor="ctr"/>
           <a:lstStyle/>
           <a:p>
-            <a:pPr indent="0" marL="0">
+            <a:pPr marL="0" indent="0">
               <a:buNone/>
             </a:pPr>
             <a:r>
@@ -6325,7 +6597,7 @@
           <a:bodyPr wrap="square" lIns="0" tIns="0" rIns="0" bIns="0" rtlCol="0" anchor="ctr"/>
           <a:lstStyle/>
           <a:p>
-            <a:pPr indent="0" marL="0">
+            <a:pPr marL="0" indent="0">
               <a:buNone/>
             </a:pPr>
             <a:r>
@@ -6364,7 +6636,7 @@
           <a:bodyPr wrap="square" lIns="0" tIns="0" rIns="0" bIns="0" rtlCol="0" anchor="ctr"/>
           <a:lstStyle/>
           <a:p>
-            <a:pPr indent="0" marL="0">
+            <a:pPr marL="0" indent="0">
               <a:buNone/>
             </a:pPr>
             <a:r>
@@ -6406,6 +6678,13 @@
             <a:prstDash val="solid"/>
           </a:ln>
         </p:spPr>
+        <p:txBody>
+          <a:bodyPr/>
+          <a:lstStyle/>
+          <a:p>
+            <a:endParaRPr lang="it-IT"/>
+          </a:p>
+        </p:txBody>
       </p:sp>
       <p:sp>
         <p:nvSpPr>
@@ -6431,6 +6710,13 @@
             <a:prstDash val="solid"/>
           </a:ln>
         </p:spPr>
+        <p:txBody>
+          <a:bodyPr/>
+          <a:lstStyle/>
+          <a:p>
+            <a:endParaRPr lang="it-IT"/>
+          </a:p>
+        </p:txBody>
       </p:sp>
       <p:sp>
         <p:nvSpPr>
@@ -6453,7 +6739,7 @@
           <a:bodyPr wrap="square" lIns="0" tIns="0" rIns="0" bIns="0" rtlCol="0" anchor="ctr"/>
           <a:lstStyle/>
           <a:p>
-            <a:pPr indent="0" marL="0">
+            <a:pPr marL="0" indent="0">
               <a:buNone/>
             </a:pPr>
             <a:r>
@@ -6492,7 +6778,7 @@
           <a:bodyPr wrap="square" lIns="0" tIns="0" rIns="0" bIns="0" rtlCol="0" anchor="ctr"/>
           <a:lstStyle/>
           <a:p>
-            <a:pPr indent="0" marL="0">
+            <a:pPr marL="0" indent="0">
               <a:buNone/>
             </a:pPr>
             <a:r>
@@ -6531,7 +6817,7 @@
           <a:bodyPr wrap="square" lIns="0" tIns="0" rIns="0" bIns="0" rtlCol="0" anchor="ctr"/>
           <a:lstStyle/>
           <a:p>
-            <a:pPr indent="0" marL="0">
+            <a:pPr marL="0" indent="0">
               <a:buNone/>
             </a:pPr>
             <a:r>
@@ -6570,7 +6856,7 @@
           <a:bodyPr wrap="square" lIns="0" tIns="0" rIns="0" bIns="0" rtlCol="0" anchor="ctr"/>
           <a:lstStyle/>
           <a:p>
-            <a:pPr indent="0" marL="0">
+            <a:pPr marL="0" indent="0">
               <a:buNone/>
             </a:pPr>
             <a:r>
@@ -6612,6 +6898,13 @@
             <a:prstDash val="solid"/>
           </a:ln>
         </p:spPr>
+        <p:txBody>
+          <a:bodyPr/>
+          <a:lstStyle/>
+          <a:p>
+            <a:endParaRPr lang="it-IT"/>
+          </a:p>
+        </p:txBody>
       </p:sp>
       <p:sp>
         <p:nvSpPr>
@@ -6637,6 +6930,13 @@
             <a:prstDash val="solid"/>
           </a:ln>
         </p:spPr>
+        <p:txBody>
+          <a:bodyPr/>
+          <a:lstStyle/>
+          <a:p>
+            <a:endParaRPr lang="it-IT"/>
+          </a:p>
+        </p:txBody>
       </p:sp>
       <p:sp>
         <p:nvSpPr>
@@ -6659,7 +6959,7 @@
           <a:bodyPr wrap="square" lIns="0" tIns="0" rIns="0" bIns="0" rtlCol="0" anchor="ctr"/>
           <a:lstStyle/>
           <a:p>
-            <a:pPr indent="0" marL="0">
+            <a:pPr marL="0" indent="0">
               <a:buNone/>
             </a:pPr>
             <a:r>
@@ -6698,7 +6998,7 @@
           <a:bodyPr wrap="square" lIns="0" tIns="0" rIns="0" bIns="0" rtlCol="0" anchor="ctr"/>
           <a:lstStyle/>
           <a:p>
-            <a:pPr indent="0" marL="0">
+            <a:pPr marL="0" indent="0">
               <a:buNone/>
             </a:pPr>
             <a:r>
@@ -6737,7 +7037,7 @@
           <a:bodyPr wrap="square" lIns="0" tIns="0" rIns="0" bIns="0" rtlCol="0" anchor="ctr"/>
           <a:lstStyle/>
           <a:p>
-            <a:pPr indent="0" marL="0">
+            <a:pPr marL="0" indent="0">
               <a:buNone/>
             </a:pPr>
             <a:r>
@@ -6776,7 +7076,7 @@
           <a:bodyPr wrap="square" lIns="0" tIns="0" rIns="0" bIns="0" rtlCol="0" anchor="ctr"/>
           <a:lstStyle/>
           <a:p>
-            <a:pPr indent="0" marL="0">
+            <a:pPr marL="0" indent="0">
               <a:buNone/>
             </a:pPr>
             <a:r>
@@ -6818,6 +7118,13 @@
             <a:prstDash val="solid"/>
           </a:ln>
         </p:spPr>
+        <p:txBody>
+          <a:bodyPr/>
+          <a:lstStyle/>
+          <a:p>
+            <a:endParaRPr lang="it-IT"/>
+          </a:p>
+        </p:txBody>
       </p:sp>
       <p:sp>
         <p:nvSpPr>
@@ -6843,6 +7150,13 @@
             <a:prstDash val="solid"/>
           </a:ln>
         </p:spPr>
+        <p:txBody>
+          <a:bodyPr/>
+          <a:lstStyle/>
+          <a:p>
+            <a:endParaRPr lang="it-IT"/>
+          </a:p>
+        </p:txBody>
       </p:sp>
       <p:sp>
         <p:nvSpPr>
@@ -6865,7 +7179,7 @@
           <a:bodyPr wrap="square" lIns="0" tIns="0" rIns="0" bIns="0" rtlCol="0" anchor="ctr"/>
           <a:lstStyle/>
           <a:p>
-            <a:pPr indent="0" marL="0">
+            <a:pPr marL="0" indent="0">
               <a:buNone/>
             </a:pPr>
             <a:r>
@@ -6904,7 +7218,7 @@
           <a:bodyPr wrap="square" lIns="0" tIns="0" rIns="0" bIns="0" rtlCol="0" anchor="ctr"/>
           <a:lstStyle/>
           <a:p>
-            <a:pPr indent="0" marL="0">
+            <a:pPr marL="0" indent="0">
               <a:buNone/>
             </a:pPr>
             <a:r>
@@ -6943,7 +7257,7 @@
           <a:bodyPr wrap="square" lIns="0" tIns="0" rIns="0" bIns="0" rtlCol="0" anchor="ctr"/>
           <a:lstStyle/>
           <a:p>
-            <a:pPr indent="0" marL="0">
+            <a:pPr marL="0" indent="0">
               <a:buNone/>
             </a:pPr>
             <a:r>
@@ -6982,7 +7296,7 @@
           <a:bodyPr wrap="square" lIns="0" tIns="0" rIns="0" bIns="0" rtlCol="0" anchor="ctr"/>
           <a:lstStyle/>
           <a:p>
-            <a:pPr indent="0" marL="0">
+            <a:pPr marL="0" indent="0">
               <a:buNone/>
             </a:pPr>
             <a:r>
@@ -7024,6 +7338,13 @@
             <a:prstDash val="solid"/>
           </a:ln>
         </p:spPr>
+        <p:txBody>
+          <a:bodyPr/>
+          <a:lstStyle/>
+          <a:p>
+            <a:endParaRPr lang="it-IT"/>
+          </a:p>
+        </p:txBody>
       </p:sp>
       <p:sp>
         <p:nvSpPr>
@@ -7049,6 +7370,13 @@
             <a:prstDash val="solid"/>
           </a:ln>
         </p:spPr>
+        <p:txBody>
+          <a:bodyPr/>
+          <a:lstStyle/>
+          <a:p>
+            <a:endParaRPr lang="it-IT"/>
+          </a:p>
+        </p:txBody>
       </p:sp>
       <p:sp>
         <p:nvSpPr>
@@ -7071,7 +7399,7 @@
           <a:bodyPr wrap="square" lIns="0" tIns="0" rIns="0" bIns="0" rtlCol="0" anchor="ctr"/>
           <a:lstStyle/>
           <a:p>
-            <a:pPr indent="0" marL="0">
+            <a:pPr marL="0" indent="0">
               <a:buNone/>
             </a:pPr>
             <a:r>
@@ -7110,7 +7438,7 @@
           <a:bodyPr wrap="square" lIns="0" tIns="0" rIns="0" bIns="0" rtlCol="0" anchor="ctr"/>
           <a:lstStyle/>
           <a:p>
-            <a:pPr indent="0" marL="0">
+            <a:pPr marL="0" indent="0">
               <a:buNone/>
             </a:pPr>
             <a:r>
@@ -7149,7 +7477,7 @@
           <a:bodyPr wrap="square" lIns="0" tIns="0" rIns="0" bIns="0" rtlCol="0" anchor="ctr"/>
           <a:lstStyle/>
           <a:p>
-            <a:pPr indent="0" marL="0">
+            <a:pPr marL="0" indent="0">
               <a:buNone/>
             </a:pPr>
             <a:r>
@@ -7188,7 +7516,7 @@
           <a:bodyPr wrap="square" lIns="0" tIns="0" rIns="0" bIns="0" rtlCol="0" anchor="ctr"/>
           <a:lstStyle/>
           <a:p>
-            <a:pPr indent="0" marL="0">
+            <a:pPr marL="0" indent="0">
               <a:buNone/>
             </a:pPr>
             <a:r>
@@ -7230,6 +7558,13 @@
             <a:prstDash val="solid"/>
           </a:ln>
         </p:spPr>
+        <p:txBody>
+          <a:bodyPr/>
+          <a:lstStyle/>
+          <a:p>
+            <a:endParaRPr lang="it-IT"/>
+          </a:p>
+        </p:txBody>
       </p:sp>
       <p:sp>
         <p:nvSpPr>
@@ -7252,7 +7587,7 @@
           <a:bodyPr wrap="square" lIns="0" tIns="0" rIns="0" bIns="0" rtlCol="0" anchor="ctr"/>
           <a:lstStyle/>
           <a:p>
-            <a:pPr indent="0" marL="0">
+            <a:pPr marL="0" indent="0">
               <a:buNone/>
             </a:pPr>
             <a:r>
@@ -7266,9 +7601,6 @@
               </a:rPr>
               <a:t>Key takeaway: </a:t>
             </a:r>
-            <a:pPr indent="0" marL="0">
-              <a:buNone/>
-            </a:pPr>
             <a:r>
               <a:rPr lang="en-US" sz="1050" dirty="0">
                 <a:solidFill>
@@ -7308,6 +7640,13 @@
             <a:prstDash val="solid"/>
           </a:ln>
         </p:spPr>
+        <p:txBody>
+          <a:bodyPr/>
+          <a:lstStyle/>
+          <a:p>
+            <a:endParaRPr lang="it-IT"/>
+          </a:p>
+        </p:txBody>
       </p:sp>
       <p:sp>
         <p:nvSpPr>
@@ -7330,7 +7669,7 @@
           <a:bodyPr wrap="square" lIns="0" tIns="0" rIns="0" bIns="0" rtlCol="0" anchor="ctr"/>
           <a:lstStyle/>
           <a:p>
-            <a:pPr indent="0" marL="0">
+            <a:pPr marL="0" indent="0">
               <a:buNone/>
             </a:pPr>
             <a:r>
@@ -7341,9 +7680,6 @@
               </a:rPr>
               <a:t>Conway to LangGraph  ·  University of Bologna</a:t>
             </a:r>
-            <a:pPr indent="0" marL="0">
-              <a:buNone/>
-            </a:pPr>
             <a:r>
               <a:rPr lang="en-US" sz="800" dirty="0">
                 <a:solidFill>
@@ -7352,9 +7688,6 @@
               </a:rPr>
               <a:t>   |   </a:t>
             </a:r>
-            <a:pPr indent="0" marL="0">
-              <a:buNone/>
-            </a:pPr>
             <a:r>
               <a:rPr lang="en-US" sz="800" b="1" dirty="0">
                 <a:solidFill>
@@ -7668,4 +8001,319 @@
     </a:ext>
   </a:extLst>
 </a:theme>
+</file>
+
+<file path=ppt/theme/theme2.xml><?xml version="1.0" encoding="utf-8"?>
+<a:theme xmlns:a="http://schemas.openxmlformats.org/drawingml/2006/main" name="Tema di Office">
+  <a:themeElements>
+    <a:clrScheme name="Office">
+      <a:dk1>
+        <a:sysClr val="windowText" lastClr="000000"/>
+      </a:dk1>
+      <a:lt1>
+        <a:sysClr val="window" lastClr="FFFFFF"/>
+      </a:lt1>
+      <a:dk2>
+        <a:srgbClr val="0E2841"/>
+      </a:dk2>
+      <a:lt2>
+        <a:srgbClr val="E8E8E8"/>
+      </a:lt2>
+      <a:accent1>
+        <a:srgbClr val="156082"/>
+      </a:accent1>
+      <a:accent2>
+        <a:srgbClr val="E97132"/>
+      </a:accent2>
+      <a:accent3>
+        <a:srgbClr val="196B24"/>
+      </a:accent3>
+      <a:accent4>
+        <a:srgbClr val="0F9ED5"/>
+      </a:accent4>
+      <a:accent5>
+        <a:srgbClr val="A02B93"/>
+      </a:accent5>
+      <a:accent6>
+        <a:srgbClr val="4EA72E"/>
+      </a:accent6>
+      <a:hlink>
+        <a:srgbClr val="467886"/>
+      </a:hlink>
+      <a:folHlink>
+        <a:srgbClr val="96607D"/>
+      </a:folHlink>
+    </a:clrScheme>
+    <a:fontScheme name="Office">
+      <a:majorFont>
+        <a:latin typeface="Aptos Display" panose="02110004020202020204"/>
+        <a:ea typeface=""/>
+        <a:cs typeface=""/>
+        <a:font script="Jpan" typeface="游ゴシック Light"/>
+        <a:font script="Hang" typeface="맑은 고딕"/>
+        <a:font script="Hans" typeface="等线 Light"/>
+        <a:font script="Hant" typeface="新細明體"/>
+        <a:font script="Arab" typeface="Times New Roman"/>
+        <a:font script="Hebr" typeface="Times New Roman"/>
+        <a:font script="Thai" typeface="Angsana New"/>
+        <a:font script="Ethi" typeface="Nyala"/>
+        <a:font script="Beng" typeface="Vrinda"/>
+        <a:font script="Gujr" typeface="Shruti"/>
+        <a:font script="Khmr" typeface="MoolBoran"/>
+        <a:font script="Knda" typeface="Tunga"/>
+        <a:font script="Guru" typeface="Raavi"/>
+        <a:font script="Cans" typeface="Euphemia"/>
+        <a:font script="Cher" typeface="Plantagenet Cherokee"/>
+        <a:font script="Yiii" typeface="Microsoft Yi Baiti"/>
+        <a:font script="Tibt" typeface="Microsoft Himalaya"/>
+        <a:font script="Thaa" typeface="MV Boli"/>
+        <a:font script="Deva" typeface="Mangal"/>
+        <a:font script="Telu" typeface="Gautami"/>
+        <a:font script="Taml" typeface="Latha"/>
+        <a:font script="Syrc" typeface="Estrangelo Edessa"/>
+        <a:font script="Orya" typeface="Kalinga"/>
+        <a:font script="Mlym" typeface="Kartika"/>
+        <a:font script="Laoo" typeface="DokChampa"/>
+        <a:font script="Sinh" typeface="Iskoola Pota"/>
+        <a:font script="Mong" typeface="Mongolian Baiti"/>
+        <a:font script="Viet" typeface="Times New Roman"/>
+        <a:font script="Uigh" typeface="Microsoft Uighur"/>
+        <a:font script="Geor" typeface="Sylfaen"/>
+        <a:font script="Armn" typeface="Arial"/>
+        <a:font script="Bugi" typeface="Leelawadee UI"/>
+        <a:font script="Bopo" typeface="Microsoft JhengHei"/>
+        <a:font script="Java" typeface="Javanese Text"/>
+        <a:font script="Lisu" typeface="Segoe UI"/>
+        <a:font script="Mymr" typeface="Myanmar Text"/>
+        <a:font script="Nkoo" typeface="Ebrima"/>
+        <a:font script="Olck" typeface="Nirmala UI"/>
+        <a:font script="Osma" typeface="Ebrima"/>
+        <a:font script="Phag" typeface="Phagspa"/>
+        <a:font script="Syrn" typeface="Estrangelo Edessa"/>
+        <a:font script="Syrj" typeface="Estrangelo Edessa"/>
+        <a:font script="Syre" typeface="Estrangelo Edessa"/>
+        <a:font script="Sora" typeface="Nirmala UI"/>
+        <a:font script="Tale" typeface="Microsoft Tai Le"/>
+        <a:font script="Talu" typeface="Microsoft New Tai Lue"/>
+        <a:font script="Tfng" typeface="Ebrima"/>
+      </a:majorFont>
+      <a:minorFont>
+        <a:latin typeface="Aptos" panose="02110004020202020204"/>
+        <a:ea typeface=""/>
+        <a:cs typeface=""/>
+        <a:font script="Jpan" typeface="游ゴシック"/>
+        <a:font script="Hang" typeface="맑은 고딕"/>
+        <a:font script="Hans" typeface="等线"/>
+        <a:font script="Hant" typeface="新細明體"/>
+        <a:font script="Arab" typeface="Arial"/>
+        <a:font script="Hebr" typeface="Arial"/>
+        <a:font script="Thai" typeface="Cordia New"/>
+        <a:font script="Ethi" typeface="Nyala"/>
+        <a:font script="Beng" typeface="Vrinda"/>
+        <a:font script="Gujr" typeface="Shruti"/>
+        <a:font script="Khmr" typeface="DaunPenh"/>
+        <a:font script="Knda" typeface="Tunga"/>
+        <a:font script="Guru" typeface="Raavi"/>
+        <a:font script="Cans" typeface="Euphemia"/>
+        <a:font script="Cher" typeface="Plantagenet Cherokee"/>
+        <a:font script="Yiii" typeface="Microsoft Yi Baiti"/>
+        <a:font script="Tibt" typeface="Microsoft Himalaya"/>
+        <a:font script="Thaa" typeface="MV Boli"/>
+        <a:font script="Deva" typeface="Mangal"/>
+        <a:font script="Telu" typeface="Gautami"/>
+        <a:font script="Taml" typeface="Latha"/>
+        <a:font script="Syrc" typeface="Estrangelo Edessa"/>
+        <a:font script="Orya" typeface="Kalinga"/>
+        <a:font script="Mlym" typeface="Kartika"/>
+        <a:font script="Laoo" typeface="DokChampa"/>
+        <a:font script="Sinh" typeface="Iskoola Pota"/>
+        <a:font script="Mong" typeface="Mongolian Baiti"/>
+        <a:font script="Viet" typeface="Arial"/>
+        <a:font script="Uigh" typeface="Microsoft Uighur"/>
+        <a:font script="Geor" typeface="Sylfaen"/>
+        <a:font script="Armn" typeface="Arial"/>
+        <a:font script="Bugi" typeface="Leelawadee UI"/>
+        <a:font script="Bopo" typeface="Microsoft JhengHei"/>
+        <a:font script="Java" typeface="Javanese Text"/>
+        <a:font script="Lisu" typeface="Segoe UI"/>
+        <a:font script="Mymr" typeface="Myanmar Text"/>
+        <a:font script="Nkoo" typeface="Ebrima"/>
+        <a:font script="Olck" typeface="Nirmala UI"/>
+        <a:font script="Osma" typeface="Ebrima"/>
+        <a:font script="Phag" typeface="Phagspa"/>
+        <a:font script="Syrn" typeface="Estrangelo Edessa"/>
+        <a:font script="Syrj" typeface="Estrangelo Edessa"/>
+        <a:font script="Syre" typeface="Estrangelo Edessa"/>
+        <a:font script="Sora" typeface="Nirmala UI"/>
+        <a:font script="Tale" typeface="Microsoft Tai Le"/>
+        <a:font script="Talu" typeface="Microsoft New Tai Lue"/>
+        <a:font script="Tfng" typeface="Ebrima"/>
+      </a:minorFont>
+    </a:fontScheme>
+    <a:fmtScheme name="Office">
+      <a:fillStyleLst>
+        <a:solidFill>
+          <a:schemeClr val="phClr"/>
+        </a:solidFill>
+        <a:gradFill rotWithShape="1">
+          <a:gsLst>
+            <a:gs pos="0">
+              <a:schemeClr val="phClr">
+                <a:lumMod val="110000"/>
+                <a:satMod val="105000"/>
+                <a:tint val="67000"/>
+              </a:schemeClr>
+            </a:gs>
+            <a:gs pos="50000">
+              <a:schemeClr val="phClr">
+                <a:lumMod val="105000"/>
+                <a:satMod val="103000"/>
+                <a:tint val="73000"/>
+              </a:schemeClr>
+            </a:gs>
+            <a:gs pos="100000">
+              <a:schemeClr val="phClr">
+                <a:lumMod val="105000"/>
+                <a:satMod val="109000"/>
+                <a:tint val="81000"/>
+              </a:schemeClr>
+            </a:gs>
+          </a:gsLst>
+          <a:lin ang="5400000" scaled="0"/>
+        </a:gradFill>
+        <a:gradFill rotWithShape="1">
+          <a:gsLst>
+            <a:gs pos="0">
+              <a:schemeClr val="phClr">
+                <a:satMod val="103000"/>
+                <a:lumMod val="102000"/>
+                <a:tint val="94000"/>
+              </a:schemeClr>
+            </a:gs>
+            <a:gs pos="50000">
+              <a:schemeClr val="phClr">
+                <a:satMod val="110000"/>
+                <a:lumMod val="100000"/>
+                <a:shade val="100000"/>
+              </a:schemeClr>
+            </a:gs>
+            <a:gs pos="100000">
+              <a:schemeClr val="phClr">
+                <a:lumMod val="99000"/>
+                <a:satMod val="120000"/>
+                <a:shade val="78000"/>
+              </a:schemeClr>
+            </a:gs>
+          </a:gsLst>
+          <a:lin ang="5400000" scaled="0"/>
+        </a:gradFill>
+      </a:fillStyleLst>
+      <a:lnStyleLst>
+        <a:ln w="12700" cap="flat" cmpd="sng" algn="ctr">
+          <a:solidFill>
+            <a:schemeClr val="phClr"/>
+          </a:solidFill>
+          <a:prstDash val="solid"/>
+          <a:miter lim="800000"/>
+        </a:ln>
+        <a:ln w="19050" cap="flat" cmpd="sng" algn="ctr">
+          <a:solidFill>
+            <a:schemeClr val="phClr"/>
+          </a:solidFill>
+          <a:prstDash val="solid"/>
+          <a:miter lim="800000"/>
+        </a:ln>
+        <a:ln w="25400" cap="flat" cmpd="sng" algn="ctr">
+          <a:solidFill>
+            <a:schemeClr val="phClr"/>
+          </a:solidFill>
+          <a:prstDash val="solid"/>
+          <a:miter lim="800000"/>
+        </a:ln>
+      </a:lnStyleLst>
+      <a:effectStyleLst>
+        <a:effectStyle>
+          <a:effectLst/>
+        </a:effectStyle>
+        <a:effectStyle>
+          <a:effectLst/>
+        </a:effectStyle>
+        <a:effectStyle>
+          <a:effectLst>
+            <a:outerShdw blurRad="57150" dist="19050" dir="5400000" algn="ctr" rotWithShape="0">
+              <a:srgbClr val="000000">
+                <a:alpha val="63000"/>
+              </a:srgbClr>
+            </a:outerShdw>
+          </a:effectLst>
+        </a:effectStyle>
+      </a:effectStyleLst>
+      <a:bgFillStyleLst>
+        <a:solidFill>
+          <a:schemeClr val="phClr"/>
+        </a:solidFill>
+        <a:solidFill>
+          <a:schemeClr val="phClr">
+            <a:tint val="95000"/>
+            <a:satMod val="170000"/>
+          </a:schemeClr>
+        </a:solidFill>
+        <a:gradFill rotWithShape="1">
+          <a:gsLst>
+            <a:gs pos="0">
+              <a:schemeClr val="phClr">
+                <a:tint val="93000"/>
+                <a:satMod val="150000"/>
+                <a:shade val="98000"/>
+                <a:lumMod val="102000"/>
+              </a:schemeClr>
+            </a:gs>
+            <a:gs pos="50000">
+              <a:schemeClr val="phClr">
+                <a:tint val="98000"/>
+                <a:satMod val="130000"/>
+                <a:shade val="90000"/>
+                <a:lumMod val="103000"/>
+              </a:schemeClr>
+            </a:gs>
+            <a:gs pos="100000">
+              <a:schemeClr val="phClr">
+                <a:shade val="63000"/>
+                <a:satMod val="120000"/>
+              </a:schemeClr>
+            </a:gs>
+          </a:gsLst>
+          <a:lin ang="5400000" scaled="0"/>
+        </a:gradFill>
+      </a:bgFillStyleLst>
+    </a:fmtScheme>
+  </a:themeElements>
+  <a:objectDefaults>
+    <a:lnDef>
+      <a:spPr/>
+      <a:bodyPr/>
+      <a:lstStyle/>
+      <a:style>
+        <a:lnRef idx="2">
+          <a:schemeClr val="accent1"/>
+        </a:lnRef>
+        <a:fillRef idx="0">
+          <a:schemeClr val="accent1"/>
+        </a:fillRef>
+        <a:effectRef idx="1">
+          <a:schemeClr val="accent1"/>
+        </a:effectRef>
+        <a:fontRef idx="minor">
+          <a:schemeClr val="tx1"/>
+        </a:fontRef>
+      </a:style>
+    </a:lnDef>
+  </a:objectDefaults>
+  <a:extraClrSchemeLst/>
+  <a:extLst>
+    <a:ext uri="{05A4C25C-085E-4340-85A3-A5531E510DB2}">
+      <thm15:themeFamily xmlns:thm15="http://schemas.microsoft.com/office/thememl/2012/main" name="Office Theme" id="{2E142A2C-CD16-42D6-873A-C26D2A0506FA}" vid="{1BDDFF52-6CD6-40A5-AB3C-68EB2F1E4D0A}"/>
+    </a:ext>
+  </a:extLst>
+</a:theme>
 </file>